--- a/presentations/ispring-course/module-01-stropovka-gruzov/live-preview/S001-S002_live_preview_working.pptx
+++ b/presentations/ispring-course/module-01-stropovka-gruzov/live-preview/S001-S002_live_preview_working.pptx
@@ -4558,7 +4558,7 @@
         <p:spPr>
           <a:xfrm>
             <a:off x="868680" y="2148840"/>
-            <a:ext cx="3886200" cy="1005840"/>
+            <a:ext cx="3886200" cy="877163"/>
           </a:xfrm>
           <a:prstGeom prst="rect">
             <a:avLst/>
@@ -4573,14 +4573,19 @@
           <a:p>
             <a:pPr algn="ctr"/>
             <a:r>
-              <a:rPr sz="1700" b="0">
+              <a:rPr lang="ru-RU" sz="1700" b="0" smtClean="0">
                 <a:solidFill>
                   <a:srgbClr val="212B36"/>
                 </a:solidFill>
               </a:rPr>
               <a:t>Рабочая озвучка уже подготовлена:
-S002-P01_ozvuchka_osnovnaya.mp3</a:t>
-            </a:r>
+S002-P01_ozvuchka_55_sec_stress_2026-06-20.mp3</a:t>
+            </a:r>
+            <a:endParaRPr sz="1700" b="0">
+              <a:solidFill>
+                <a:srgbClr val="212B36"/>
+              </a:solidFill>
+            </a:endParaRPr>
           </a:p>
         </p:txBody>
       </p:sp>

--- a/presentations/ispring-course/module-01-stropovka-gruzov/live-preview/S001-S002_live_preview_working.pptx
+++ b/presentations/ispring-course/module-01-stropovka-gruzov/live-preview/S001-S002_live_preview_working.pptx
@@ -9,6 +9,11 @@
     <p:sldId id="257" r:id="rId3"/>
     <p:sldId id="258" r:id="rId4"/>
     <p:sldId id="259" r:id="rId5"/>
+    <p:sldId id="260" r:id="rId6"/>
+    <p:sldId id="261" r:id="rId7"/>
+    <p:sldId id="262" r:id="rId8"/>
+    <p:sldId id="263" r:id="rId9"/>
+    <p:sldId id="264" r:id="rId10"/>
   </p:sldIdLst>
   <p:sldSz cx="12192000" cy="6858000"/>
   <p:notesSz cx="6858000" cy="9144000"/>
@@ -3083,7 +3088,7 @@
 
 <file path=ppt/slides/slide1.xml><?xml version="1.0" encoding="utf-8"?>
 <p:sld xmlns:a="http://schemas.openxmlformats.org/drawingml/2006/main" xmlns:r="http://schemas.openxmlformats.org/officeDocument/2006/relationships" xmlns:p="http://schemas.openxmlformats.org/presentationml/2006/main">
-  <p:cSld name="S001">
+  <p:cSld>
     <p:bg>
       <p:bgPr>
         <a:solidFill>
@@ -3605,7 +3610,7 @@
 
 <file path=ppt/slides/slide2.xml><?xml version="1.0" encoding="utf-8"?>
 <p:sld xmlns:a="http://schemas.openxmlformats.org/drawingml/2006/main" xmlns:r="http://schemas.openxmlformats.org/officeDocument/2006/relationships" xmlns:p="http://schemas.openxmlformats.org/presentationml/2006/main">
-  <p:cSld name="S002">
+  <p:cSld>
     <p:bg>
       <p:bgPr>
         <a:solidFill>
@@ -4273,6 +4278,116 @@
           </a:p>
         </p:txBody>
       </p:sp>
+      <p:sp>
+        <p:nvSpPr>
+          <p:cNvPr id="15" name="Rounded Rectangle 14">
+            <a:hlinkClick r:id="rId4" action="ppaction://hlinksldjump"/>
+          </p:cNvPr>
+          <p:cNvSpPr/>
+          <p:nvPr/>
+        </p:nvSpPr>
+        <p:spPr>
+          <a:xfrm>
+            <a:off x="640080" y="5989320"/>
+            <a:ext cx="2148840" cy="457200"/>
+          </a:xfrm>
+          <a:prstGeom prst="roundRect">
+            <a:avLst/>
+          </a:prstGeom>
+          <a:solidFill>
+            <a:srgbClr val="537795"/>
+          </a:solidFill>
+          <a:ln>
+            <a:solidFill>
+              <a:srgbClr val="537795"/>
+            </a:solidFill>
+          </a:ln>
+        </p:spPr>
+        <p:style>
+          <a:lnRef idx="1">
+            <a:schemeClr val="accent1"/>
+          </a:lnRef>
+          <a:fillRef idx="3">
+            <a:schemeClr val="accent1"/>
+          </a:fillRef>
+          <a:effectRef idx="2">
+            <a:schemeClr val="accent1"/>
+          </a:effectRef>
+          <a:fontRef idx="minor">
+            <a:schemeClr val="lt1"/>
+          </a:fontRef>
+        </p:style>
+        <p:txBody>
+          <a:bodyPr rtlCol="0" anchor="ctr"/>
+          <a:lstStyle/>
+          <a:p>
+            <a:pPr algn="ctr"/>
+            <a:r>
+              <a:rPr sz="1800" b="1">
+                <a:solidFill>
+                  <a:srgbClr val="FFFFFF"/>
+                </a:solidFill>
+              </a:rPr>
+              <a:t>НАЗАД</a:t>
+            </a:r>
+          </a:p>
+        </p:txBody>
+      </p:sp>
+      <p:sp>
+        <p:nvSpPr>
+          <p:cNvPr id="16" name="Rounded Rectangle 15">
+            <a:hlinkClick r:id="rId5" action="ppaction://hlinksldjump"/>
+          </p:cNvPr>
+          <p:cNvSpPr/>
+          <p:nvPr/>
+        </p:nvSpPr>
+        <p:spPr>
+          <a:xfrm>
+            <a:off x="9372600" y="5989320"/>
+            <a:ext cx="2148840" cy="457200"/>
+          </a:xfrm>
+          <a:prstGeom prst="roundRect">
+            <a:avLst/>
+          </a:prstGeom>
+          <a:solidFill>
+            <a:srgbClr val="DE7436"/>
+          </a:solidFill>
+          <a:ln>
+            <a:solidFill>
+              <a:srgbClr val="DE7436"/>
+            </a:solidFill>
+          </a:ln>
+        </p:spPr>
+        <p:style>
+          <a:lnRef idx="1">
+            <a:schemeClr val="accent1"/>
+          </a:lnRef>
+          <a:fillRef idx="3">
+            <a:schemeClr val="accent1"/>
+          </a:fillRef>
+          <a:effectRef idx="2">
+            <a:schemeClr val="accent1"/>
+          </a:effectRef>
+          <a:fontRef idx="minor">
+            <a:schemeClr val="lt1"/>
+          </a:fontRef>
+        </p:style>
+        <p:txBody>
+          <a:bodyPr rtlCol="0" anchor="ctr"/>
+          <a:lstStyle/>
+          <a:p>
+            <a:pPr algn="ctr"/>
+            <a:r>
+              <a:rPr sz="1800" b="1">
+                <a:solidFill>
+                  <a:srgbClr val="FFFFFF"/>
+                </a:solidFill>
+              </a:rPr>
+              <a:t>ДАЛЕЕ</a:t>
+            </a:r>
+          </a:p>
+        </p:txBody>
+      </p:sp>
     </p:spTree>
   </p:cSld>
   <p:clrMapOvr>
@@ -4283,7 +4398,7 @@
 
 <file path=ppt/slides/slide3.xml><?xml version="1.0" encoding="utf-8"?>
 <p:sld xmlns:a="http://schemas.openxmlformats.org/drawingml/2006/main" xmlns:r="http://schemas.openxmlformats.org/officeDocument/2006/relationships" xmlns:p="http://schemas.openxmlformats.org/presentationml/2006/main">
-  <p:cSld name="S002-P01">
+  <p:cSld>
     <p:bg>
       <p:bgPr>
         <a:solidFill>
@@ -4558,7 +4673,7 @@
         <p:spPr>
           <a:xfrm>
             <a:off x="868680" y="2148840"/>
-            <a:ext cx="3886200" cy="877163"/>
+            <a:ext cx="3886200" cy="1005840"/>
           </a:xfrm>
           <a:prstGeom prst="rect">
             <a:avLst/>
@@ -4573,7 +4688,7 @@
           <a:p>
             <a:pPr algn="ctr"/>
             <a:r>
-              <a:rPr lang="ru-RU" sz="1700" b="0" smtClean="0">
+              <a:rPr sz="1700" b="0">
                 <a:solidFill>
                   <a:srgbClr val="212B36"/>
                 </a:solidFill>
@@ -4581,17 +4696,65 @@
               <a:t>Рабочая озвучка уже подготовлена:
 S002-P01_ozvuchka_55_sec_stress_2026-06-20.mp3</a:t>
             </a:r>
-            <a:endParaRPr sz="1700" b="0">
-              <a:solidFill>
-                <a:srgbClr val="212B36"/>
-              </a:solidFill>
-            </a:endParaRPr>
-          </a:p>
-        </p:txBody>
-      </p:sp>
-      <p:sp>
-        <p:nvSpPr>
-          <p:cNvPr id="9" name="TextBox 8"/>
+          </a:p>
+        </p:txBody>
+      </p:sp>
+      <p:sp>
+        <p:nvSpPr>
+          <p:cNvPr id="9" name="Rounded Rectangle 8"/>
+          <p:cNvSpPr/>
+          <p:nvPr/>
+        </p:nvSpPr>
+        <p:spPr>
+          <a:xfrm>
+            <a:off x="960120" y="4096512"/>
+            <a:ext cx="3749039" cy="530352"/>
+          </a:xfrm>
+          <a:prstGeom prst="roundRect">
+            <a:avLst/>
+          </a:prstGeom>
+          <a:solidFill>
+            <a:srgbClr val="DE7436"/>
+          </a:solidFill>
+          <a:ln>
+            <a:solidFill>
+              <a:srgbClr val="DE7436"/>
+            </a:solidFill>
+          </a:ln>
+        </p:spPr>
+        <p:style>
+          <a:lnRef idx="1">
+            <a:schemeClr val="accent1"/>
+          </a:lnRef>
+          <a:fillRef idx="3">
+            <a:schemeClr val="accent1"/>
+          </a:fillRef>
+          <a:effectRef idx="2">
+            <a:schemeClr val="accent1"/>
+          </a:effectRef>
+          <a:fontRef idx="minor">
+            <a:schemeClr val="lt1"/>
+          </a:fontRef>
+        </p:style>
+        <p:txBody>
+          <a:bodyPr rtlCol="0" anchor="ctr"/>
+          <a:lstStyle/>
+          <a:p>
+            <a:pPr algn="ctr"/>
+            <a:r>
+              <a:rPr sz="1800" b="1">
+                <a:solidFill>
+                  <a:srgbClr val="FFFFFF"/>
+                </a:solidFill>
+              </a:rPr>
+              <a:t>ОТКРЫТЬ ВИДЕОИНСТРУКЦИЮ</a:t>
+            </a:r>
+          </a:p>
+        </p:txBody>
+      </p:sp>
+      <p:sp>
+        <p:nvSpPr>
+          <p:cNvPr id="10" name="TextBox 9"/>
           <p:cNvSpPr txBox="1"/>
           <p:nvPr/>
         </p:nvSpPr>
@@ -4625,7 +4788,7 @@
       </p:sp>
       <p:sp>
         <p:nvSpPr>
-          <p:cNvPr id="10" name="Rounded Rectangle 9"/>
+          <p:cNvPr id="11" name="Rounded Rectangle 10"/>
           <p:cNvSpPr/>
           <p:nvPr/>
         </p:nvSpPr>
@@ -4671,7 +4834,7 @@
       </p:sp>
       <p:sp>
         <p:nvSpPr>
-          <p:cNvPr id="11" name="Rounded Rectangle 10"/>
+          <p:cNvPr id="12" name="Rounded Rectangle 11"/>
           <p:cNvSpPr/>
           <p:nvPr/>
         </p:nvSpPr>
@@ -4724,7 +4887,7 @@
       </p:sp>
       <p:sp>
         <p:nvSpPr>
-          <p:cNvPr id="12" name="TextBox 11"/>
+          <p:cNvPr id="13" name="TextBox 12"/>
           <p:cNvSpPr txBox="1"/>
           <p:nvPr/>
         </p:nvSpPr>
@@ -4822,7 +4985,7 @@
       </p:sp>
       <p:sp>
         <p:nvSpPr>
-          <p:cNvPr id="13" name="Rounded Rectangle 12">
+          <p:cNvPr id="14" name="Rounded Rectangle 13">
             <a:hlinkClick r:id="rId2" action="ppaction://hlinksldjump"/>
           </p:cNvPr>
           <p:cNvSpPr/>
@@ -4885,7 +5048,7 @@
 
 <file path=ppt/slides/slide4.xml><?xml version="1.0" encoding="utf-8"?>
 <p:sld xmlns:a="http://schemas.openxmlformats.org/drawingml/2006/main" xmlns:r="http://schemas.openxmlformats.org/officeDocument/2006/relationships" xmlns:p="http://schemas.openxmlformats.org/presentationml/2006/main">
-  <p:cSld name="S002-P02">
+  <p:cSld>
     <p:bg>
       <p:bgPr>
         <a:solidFill>
@@ -5456,6 +5619,3126 @@
                 </a:solidFill>
               </a:rPr>
               <a:t>НАЗАД К КУРСУ</a:t>
+            </a:r>
+          </a:p>
+        </p:txBody>
+      </p:sp>
+    </p:spTree>
+  </p:cSld>
+  <p:clrMapOvr>
+    <a:masterClrMapping/>
+  </p:clrMapOvr>
+</p:sld>
+</file>
+
+<file path=ppt/slides/slide5.xml><?xml version="1.0" encoding="utf-8"?>
+<p:sld xmlns:a="http://schemas.openxmlformats.org/drawingml/2006/main" xmlns:r="http://schemas.openxmlformats.org/officeDocument/2006/relationships" xmlns:p="http://schemas.openxmlformats.org/presentationml/2006/main">
+  <p:cSld>
+    <p:bg>
+      <p:bgPr>
+        <a:solidFill>
+          <a:srgbClr val="F0F4F7"/>
+        </a:solidFill>
+        <a:effectLst/>
+      </p:bgPr>
+    </p:bg>
+    <p:spTree>
+      <p:nvGrpSpPr>
+        <p:cNvPr id="1" name=""/>
+        <p:cNvGrpSpPr/>
+        <p:nvPr/>
+      </p:nvGrpSpPr>
+      <p:grpSpPr>
+        <a:xfrm>
+          <a:off x="0" y="0"/>
+          <a:ext cx="0" cy="0"/>
+          <a:chOff x="0" y="0"/>
+          <a:chExt cx="0" cy="0"/>
+        </a:xfrm>
+      </p:grpSpPr>
+      <p:sp>
+        <p:nvSpPr>
+          <p:cNvPr id="2" name="Rectangle 1"/>
+          <p:cNvSpPr/>
+          <p:nvPr/>
+        </p:nvSpPr>
+        <p:spPr>
+          <a:xfrm>
+            <a:off x="0" y="0"/>
+            <a:ext cx="12191695" cy="658368"/>
+          </a:xfrm>
+          <a:prstGeom prst="rect">
+            <a:avLst/>
+          </a:prstGeom>
+          <a:solidFill>
+            <a:srgbClr val="122B42"/>
+          </a:solidFill>
+          <a:ln>
+            <a:noFill/>
+          </a:ln>
+        </p:spPr>
+        <p:style>
+          <a:lnRef idx="1">
+            <a:schemeClr val="accent1"/>
+          </a:lnRef>
+          <a:fillRef idx="3">
+            <a:schemeClr val="accent1"/>
+          </a:fillRef>
+          <a:effectRef idx="2">
+            <a:schemeClr val="accent1"/>
+          </a:effectRef>
+          <a:fontRef idx="minor">
+            <a:schemeClr val="lt1"/>
+          </a:fontRef>
+        </p:style>
+        <p:txBody>
+          <a:bodyPr rtlCol="0" anchor="ctr"/>
+          <a:lstStyle/>
+          <a:p>
+            <a:pPr algn="ctr"/>
+            <a:endParaRPr/>
+          </a:p>
+        </p:txBody>
+      </p:sp>
+      <p:sp>
+        <p:nvSpPr>
+          <p:cNvPr id="3" name="TextBox 2"/>
+          <p:cNvSpPr txBox="1"/>
+          <p:nvPr/>
+        </p:nvSpPr>
+        <p:spPr>
+          <a:xfrm>
+            <a:off x="411480" y="128016"/>
+            <a:ext cx="7863840" cy="274320"/>
+          </a:xfrm>
+          <a:prstGeom prst="rect">
+            <a:avLst/>
+          </a:prstGeom>
+          <a:noFill/>
+        </p:spPr>
+        <p:txBody>
+          <a:bodyPr wrap="square">
+            <a:spAutoFit/>
+          </a:bodyPr>
+          <a:lstStyle/>
+          <a:p>
+            <a:pPr algn="l"/>
+            <a:r>
+              <a:rPr sz="2400" b="1">
+                <a:solidFill>
+                  <a:srgbClr val="FFFFFF"/>
+                </a:solidFill>
+              </a:rPr>
+              <a:t>Какие документы регулируют работу стропальщика</a:t>
+            </a:r>
+          </a:p>
+        </p:txBody>
+      </p:sp>
+      <p:sp>
+        <p:nvSpPr>
+          <p:cNvPr id="4" name="Rounded Rectangle 3"/>
+          <p:cNvSpPr/>
+          <p:nvPr/>
+        </p:nvSpPr>
+        <p:spPr>
+          <a:xfrm>
+            <a:off x="10469880" y="128016"/>
+            <a:ext cx="1234440" cy="320040"/>
+          </a:xfrm>
+          <a:prstGeom prst="roundRect">
+            <a:avLst/>
+          </a:prstGeom>
+          <a:solidFill>
+            <a:srgbClr val="DE7436"/>
+          </a:solidFill>
+          <a:ln>
+            <a:noFill/>
+          </a:ln>
+        </p:spPr>
+        <p:style>
+          <a:lnRef idx="1">
+            <a:schemeClr val="accent1"/>
+          </a:lnRef>
+          <a:fillRef idx="3">
+            <a:schemeClr val="accent1"/>
+          </a:fillRef>
+          <a:effectRef idx="2">
+            <a:schemeClr val="accent1"/>
+          </a:effectRef>
+          <a:fontRef idx="minor">
+            <a:schemeClr val="lt1"/>
+          </a:fontRef>
+        </p:style>
+        <p:txBody>
+          <a:bodyPr rtlCol="0" anchor="ctr"/>
+          <a:lstStyle/>
+          <a:p>
+            <a:pPr algn="ctr"/>
+            <a:r>
+              <a:rPr sz="1600" b="1">
+                <a:solidFill>
+                  <a:srgbClr val="FFFFFF"/>
+                </a:solidFill>
+              </a:rPr>
+              <a:t>S003</a:t>
+            </a:r>
+          </a:p>
+        </p:txBody>
+      </p:sp>
+      <p:sp>
+        <p:nvSpPr>
+          <p:cNvPr id="5" name="TextBox 4"/>
+          <p:cNvSpPr txBox="1"/>
+          <p:nvPr/>
+        </p:nvSpPr>
+        <p:spPr>
+          <a:xfrm>
+            <a:off x="457200" y="749808"/>
+            <a:ext cx="5943600" cy="228600"/>
+          </a:xfrm>
+          <a:prstGeom prst="rect">
+            <a:avLst/>
+          </a:prstGeom>
+          <a:noFill/>
+        </p:spPr>
+        <p:txBody>
+          <a:bodyPr wrap="square">
+            <a:spAutoFit/>
+          </a:bodyPr>
+          <a:lstStyle/>
+          <a:p>
+            <a:pPr algn="l"/>
+            <a:r>
+              <a:rPr sz="1100" b="0">
+                <a:solidFill>
+                  <a:srgbClr val="6E7A86"/>
+                </a:solidFill>
+              </a:rPr>
+              <a:t>Тема 1 • общая часть</a:t>
+            </a:r>
+          </a:p>
+        </p:txBody>
+      </p:sp>
+      <p:sp>
+        <p:nvSpPr>
+          <p:cNvPr id="6" name="Rounded Rectangle 5"/>
+          <p:cNvSpPr/>
+          <p:nvPr/>
+        </p:nvSpPr>
+        <p:spPr>
+          <a:xfrm>
+            <a:off x="640080" y="1325880"/>
+            <a:ext cx="5303520" cy="4297680"/>
+          </a:xfrm>
+          <a:prstGeom prst="roundRect">
+            <a:avLst/>
+          </a:prstGeom>
+          <a:solidFill>
+            <a:srgbClr val="FFFFFF"/>
+          </a:solidFill>
+          <a:ln w="19050">
+            <a:solidFill>
+              <a:srgbClr val="265A89"/>
+            </a:solidFill>
+          </a:ln>
+        </p:spPr>
+        <p:style>
+          <a:lnRef idx="1">
+            <a:schemeClr val="accent1"/>
+          </a:lnRef>
+          <a:fillRef idx="3">
+            <a:schemeClr val="accent1"/>
+          </a:fillRef>
+          <a:effectRef idx="2">
+            <a:schemeClr val="accent1"/>
+          </a:effectRef>
+          <a:fontRef idx="minor">
+            <a:schemeClr val="lt1"/>
+          </a:fontRef>
+        </p:style>
+        <p:txBody>
+          <a:bodyPr rtlCol="0" anchor="ctr"/>
+          <a:lstStyle/>
+          <a:p>
+            <a:pPr algn="ctr"/>
+            <a:endParaRPr/>
+          </a:p>
+        </p:txBody>
+      </p:sp>
+      <p:sp>
+        <p:nvSpPr>
+          <p:cNvPr id="7" name="Rounded Rectangle 6"/>
+          <p:cNvSpPr/>
+          <p:nvPr/>
+        </p:nvSpPr>
+        <p:spPr>
+          <a:xfrm>
+            <a:off x="640080" y="1325880"/>
+            <a:ext cx="5303520" cy="658368"/>
+          </a:xfrm>
+          <a:prstGeom prst="roundRect">
+            <a:avLst/>
+          </a:prstGeom>
+          <a:solidFill>
+            <a:srgbClr val="265A89"/>
+          </a:solidFill>
+          <a:ln>
+            <a:solidFill>
+              <a:srgbClr val="265A89"/>
+            </a:solidFill>
+          </a:ln>
+        </p:spPr>
+        <p:style>
+          <a:lnRef idx="1">
+            <a:schemeClr val="accent1"/>
+          </a:lnRef>
+          <a:fillRef idx="3">
+            <a:schemeClr val="accent1"/>
+          </a:fillRef>
+          <a:effectRef idx="2">
+            <a:schemeClr val="accent1"/>
+          </a:effectRef>
+          <a:fontRef idx="minor">
+            <a:schemeClr val="lt1"/>
+          </a:fontRef>
+        </p:style>
+        <p:txBody>
+          <a:bodyPr rtlCol="0" anchor="ctr"/>
+          <a:lstStyle/>
+          <a:p>
+            <a:pPr algn="ctr"/>
+            <a:r>
+              <a:rPr sz="2200" b="1">
+                <a:solidFill>
+                  <a:srgbClr val="FFFFFF"/>
+                </a:solidFill>
+              </a:rPr>
+              <a:t>Основа работы</a:t>
+            </a:r>
+          </a:p>
+        </p:txBody>
+      </p:sp>
+      <p:sp>
+        <p:nvSpPr>
+          <p:cNvPr id="8" name="TextBox 7"/>
+          <p:cNvSpPr txBox="1"/>
+          <p:nvPr/>
+        </p:nvSpPr>
+        <p:spPr>
+          <a:xfrm>
+            <a:off x="896112" y="2240280"/>
+            <a:ext cx="4791456" cy="3200400"/>
+          </a:xfrm>
+          <a:prstGeom prst="rect">
+            <a:avLst/>
+          </a:prstGeom>
+          <a:noFill/>
+        </p:spPr>
+        <p:txBody>
+          <a:bodyPr wrap="square">
+            <a:spAutoFit/>
+          </a:bodyPr>
+          <a:lstStyle/>
+          <a:p>
+            <a:pPr>
+              <a:spcAft>
+                <a:spcPts val="800"/>
+              </a:spcAft>
+            </a:pPr>
+            <a:r>
+              <a:rPr sz="1700">
+                <a:solidFill>
+                  <a:srgbClr val="212B36"/>
+                </a:solidFill>
+              </a:rPr>
+              <a:t>Трудовое законодательство.</a:t>
+            </a:r>
+          </a:p>
+          <a:p>
+            <a:pPr>
+              <a:spcAft>
+                <a:spcPts val="800"/>
+              </a:spcAft>
+            </a:pPr>
+            <a:r>
+              <a:rPr sz="1700">
+                <a:solidFill>
+                  <a:srgbClr val="212B36"/>
+                </a:solidFill>
+              </a:rPr>
+              <a:t>Правила по охране труда.</a:t>
+            </a:r>
+          </a:p>
+          <a:p>
+            <a:pPr>
+              <a:spcAft>
+                <a:spcPts val="800"/>
+              </a:spcAft>
+            </a:pPr>
+            <a:r>
+              <a:rPr sz="1700">
+                <a:solidFill>
+                  <a:srgbClr val="212B36"/>
+                </a:solidFill>
+              </a:rPr>
+              <a:t>Требования промышленной безопасности.</a:t>
+            </a:r>
+          </a:p>
+          <a:p>
+            <a:pPr>
+              <a:spcAft>
+                <a:spcPts val="800"/>
+              </a:spcAft>
+            </a:pPr>
+            <a:r>
+              <a:rPr sz="1700">
+                <a:solidFill>
+                  <a:srgbClr val="212B36"/>
+                </a:solidFill>
+              </a:rPr>
+              <a:t>Инструкции и правила работодателя.</a:t>
+            </a:r>
+          </a:p>
+        </p:txBody>
+      </p:sp>
+      <p:sp>
+        <p:nvSpPr>
+          <p:cNvPr id="9" name="Rounded Rectangle 8"/>
+          <p:cNvSpPr/>
+          <p:nvPr/>
+        </p:nvSpPr>
+        <p:spPr>
+          <a:xfrm>
+            <a:off x="6309360" y="1325880"/>
+            <a:ext cx="5212080" cy="4297680"/>
+          </a:xfrm>
+          <a:prstGeom prst="roundRect">
+            <a:avLst/>
+          </a:prstGeom>
+          <a:solidFill>
+            <a:srgbClr val="FFFFFF"/>
+          </a:solidFill>
+          <a:ln w="19050">
+            <a:solidFill>
+              <a:srgbClr val="42855F"/>
+            </a:solidFill>
+          </a:ln>
+        </p:spPr>
+        <p:style>
+          <a:lnRef idx="1">
+            <a:schemeClr val="accent1"/>
+          </a:lnRef>
+          <a:fillRef idx="3">
+            <a:schemeClr val="accent1"/>
+          </a:fillRef>
+          <a:effectRef idx="2">
+            <a:schemeClr val="accent1"/>
+          </a:effectRef>
+          <a:fontRef idx="minor">
+            <a:schemeClr val="lt1"/>
+          </a:fontRef>
+        </p:style>
+        <p:txBody>
+          <a:bodyPr rtlCol="0" anchor="ctr"/>
+          <a:lstStyle/>
+          <a:p>
+            <a:pPr algn="ctr"/>
+            <a:endParaRPr/>
+          </a:p>
+        </p:txBody>
+      </p:sp>
+      <p:sp>
+        <p:nvSpPr>
+          <p:cNvPr id="10" name="Rounded Rectangle 9"/>
+          <p:cNvSpPr/>
+          <p:nvPr/>
+        </p:nvSpPr>
+        <p:spPr>
+          <a:xfrm>
+            <a:off x="6309360" y="1325880"/>
+            <a:ext cx="5212080" cy="658368"/>
+          </a:xfrm>
+          <a:prstGeom prst="roundRect">
+            <a:avLst/>
+          </a:prstGeom>
+          <a:solidFill>
+            <a:srgbClr val="42855F"/>
+          </a:solidFill>
+          <a:ln>
+            <a:solidFill>
+              <a:srgbClr val="42855F"/>
+            </a:solidFill>
+          </a:ln>
+        </p:spPr>
+        <p:style>
+          <a:lnRef idx="1">
+            <a:schemeClr val="accent1"/>
+          </a:lnRef>
+          <a:fillRef idx="3">
+            <a:schemeClr val="accent1"/>
+          </a:fillRef>
+          <a:effectRef idx="2">
+            <a:schemeClr val="accent1"/>
+          </a:effectRef>
+          <a:fontRef idx="minor">
+            <a:schemeClr val="lt1"/>
+          </a:fontRef>
+        </p:style>
+        <p:txBody>
+          <a:bodyPr rtlCol="0" anchor="ctr"/>
+          <a:lstStyle/>
+          <a:p>
+            <a:pPr algn="ctr"/>
+            <a:r>
+              <a:rPr sz="2200" b="1">
+                <a:solidFill>
+                  <a:srgbClr val="FFFFFF"/>
+                </a:solidFill>
+              </a:rPr>
+              <a:t>Что надо понять</a:t>
+            </a:r>
+          </a:p>
+        </p:txBody>
+      </p:sp>
+      <p:sp>
+        <p:nvSpPr>
+          <p:cNvPr id="11" name="TextBox 10"/>
+          <p:cNvSpPr txBox="1"/>
+          <p:nvPr/>
+        </p:nvSpPr>
+        <p:spPr>
+          <a:xfrm>
+            <a:off x="6565392" y="2240280"/>
+            <a:ext cx="4700016" cy="3200400"/>
+          </a:xfrm>
+          <a:prstGeom prst="rect">
+            <a:avLst/>
+          </a:prstGeom>
+          <a:noFill/>
+        </p:spPr>
+        <p:txBody>
+          <a:bodyPr wrap="square">
+            <a:spAutoFit/>
+          </a:bodyPr>
+          <a:lstStyle/>
+          <a:p>
+            <a:pPr>
+              <a:spcAft>
+                <a:spcPts val="800"/>
+              </a:spcAft>
+            </a:pPr>
+            <a:r>
+              <a:rPr sz="1700">
+                <a:solidFill>
+                  <a:srgbClr val="212B36"/>
+                </a:solidFill>
+              </a:rPr>
+              <a:t>Стропальщик работает не по привычке, а по правилам.</a:t>
+            </a:r>
+          </a:p>
+          <a:p>
+            <a:pPr>
+              <a:spcAft>
+                <a:spcPts val="800"/>
+              </a:spcAft>
+            </a:pPr>
+            <a:r>
+              <a:rPr sz="1700">
+                <a:solidFill>
+                  <a:srgbClr val="212B36"/>
+                </a:solidFill>
+              </a:rPr>
+              <a:t>Каждый из этих блоков влияет на безопасность работ.</a:t>
+            </a:r>
+          </a:p>
+          <a:p>
+            <a:pPr>
+              <a:spcAft>
+                <a:spcPts val="800"/>
+              </a:spcAft>
+            </a:pPr>
+            <a:r>
+              <a:rPr sz="1700">
+                <a:solidFill>
+                  <a:srgbClr val="212B36"/>
+                </a:solidFill>
+              </a:rPr>
+              <a:t>Нарушать инструкции и схемы нельзя.</a:t>
+            </a:r>
+          </a:p>
+        </p:txBody>
+      </p:sp>
+      <p:sp>
+        <p:nvSpPr>
+          <p:cNvPr id="12" name="Rounded Rectangle 11">
+            <a:hlinkClick r:id="rId2" action="ppaction://hlinksldjump"/>
+          </p:cNvPr>
+          <p:cNvSpPr/>
+          <p:nvPr/>
+        </p:nvSpPr>
+        <p:spPr>
+          <a:xfrm>
+            <a:off x="640080" y="5989320"/>
+            <a:ext cx="2148840" cy="457200"/>
+          </a:xfrm>
+          <a:prstGeom prst="roundRect">
+            <a:avLst/>
+          </a:prstGeom>
+          <a:solidFill>
+            <a:srgbClr val="537795"/>
+          </a:solidFill>
+          <a:ln>
+            <a:solidFill>
+              <a:srgbClr val="537795"/>
+            </a:solidFill>
+          </a:ln>
+        </p:spPr>
+        <p:style>
+          <a:lnRef idx="1">
+            <a:schemeClr val="accent1"/>
+          </a:lnRef>
+          <a:fillRef idx="3">
+            <a:schemeClr val="accent1"/>
+          </a:fillRef>
+          <a:effectRef idx="2">
+            <a:schemeClr val="accent1"/>
+          </a:effectRef>
+          <a:fontRef idx="minor">
+            <a:schemeClr val="lt1"/>
+          </a:fontRef>
+        </p:style>
+        <p:txBody>
+          <a:bodyPr rtlCol="0" anchor="ctr"/>
+          <a:lstStyle/>
+          <a:p>
+            <a:pPr algn="ctr"/>
+            <a:r>
+              <a:rPr sz="1800" b="1">
+                <a:solidFill>
+                  <a:srgbClr val="FFFFFF"/>
+                </a:solidFill>
+              </a:rPr>
+              <a:t>НАЗАД</a:t>
+            </a:r>
+          </a:p>
+        </p:txBody>
+      </p:sp>
+      <p:sp>
+        <p:nvSpPr>
+          <p:cNvPr id="13" name="Rounded Rectangle 12">
+            <a:hlinkClick r:id="rId3" action="ppaction://hlinksldjump"/>
+          </p:cNvPr>
+          <p:cNvSpPr/>
+          <p:nvPr/>
+        </p:nvSpPr>
+        <p:spPr>
+          <a:xfrm>
+            <a:off x="9372600" y="5989320"/>
+            <a:ext cx="2148840" cy="457200"/>
+          </a:xfrm>
+          <a:prstGeom prst="roundRect">
+            <a:avLst/>
+          </a:prstGeom>
+          <a:solidFill>
+            <a:srgbClr val="DE7436"/>
+          </a:solidFill>
+          <a:ln>
+            <a:solidFill>
+              <a:srgbClr val="DE7436"/>
+            </a:solidFill>
+          </a:ln>
+        </p:spPr>
+        <p:style>
+          <a:lnRef idx="1">
+            <a:schemeClr val="accent1"/>
+          </a:lnRef>
+          <a:fillRef idx="3">
+            <a:schemeClr val="accent1"/>
+          </a:fillRef>
+          <a:effectRef idx="2">
+            <a:schemeClr val="accent1"/>
+          </a:effectRef>
+          <a:fontRef idx="minor">
+            <a:schemeClr val="lt1"/>
+          </a:fontRef>
+        </p:style>
+        <p:txBody>
+          <a:bodyPr rtlCol="0" anchor="ctr"/>
+          <a:lstStyle/>
+          <a:p>
+            <a:pPr algn="ctr"/>
+            <a:r>
+              <a:rPr sz="1800" b="1">
+                <a:solidFill>
+                  <a:srgbClr val="FFFFFF"/>
+                </a:solidFill>
+              </a:rPr>
+              <a:t>ДАЛЕЕ</a:t>
+            </a:r>
+          </a:p>
+        </p:txBody>
+      </p:sp>
+    </p:spTree>
+  </p:cSld>
+  <p:clrMapOvr>
+    <a:masterClrMapping/>
+  </p:clrMapOvr>
+</p:sld>
+</file>
+
+<file path=ppt/slides/slide6.xml><?xml version="1.0" encoding="utf-8"?>
+<p:sld xmlns:a="http://schemas.openxmlformats.org/drawingml/2006/main" xmlns:r="http://schemas.openxmlformats.org/officeDocument/2006/relationships" xmlns:p="http://schemas.openxmlformats.org/presentationml/2006/main">
+  <p:cSld>
+    <p:bg>
+      <p:bgPr>
+        <a:solidFill>
+          <a:srgbClr val="F0F4F7"/>
+        </a:solidFill>
+        <a:effectLst/>
+      </p:bgPr>
+    </p:bg>
+    <p:spTree>
+      <p:nvGrpSpPr>
+        <p:cNvPr id="1" name=""/>
+        <p:cNvGrpSpPr/>
+        <p:nvPr/>
+      </p:nvGrpSpPr>
+      <p:grpSpPr>
+        <a:xfrm>
+          <a:off x="0" y="0"/>
+          <a:ext cx="0" cy="0"/>
+          <a:chOff x="0" y="0"/>
+          <a:chExt cx="0" cy="0"/>
+        </a:xfrm>
+      </p:grpSpPr>
+      <p:sp>
+        <p:nvSpPr>
+          <p:cNvPr id="2" name="Rectangle 1"/>
+          <p:cNvSpPr/>
+          <p:nvPr/>
+        </p:nvSpPr>
+        <p:spPr>
+          <a:xfrm>
+            <a:off x="0" y="0"/>
+            <a:ext cx="12191695" cy="658368"/>
+          </a:xfrm>
+          <a:prstGeom prst="rect">
+            <a:avLst/>
+          </a:prstGeom>
+          <a:solidFill>
+            <a:srgbClr val="122B42"/>
+          </a:solidFill>
+          <a:ln>
+            <a:noFill/>
+          </a:ln>
+        </p:spPr>
+        <p:style>
+          <a:lnRef idx="1">
+            <a:schemeClr val="accent1"/>
+          </a:lnRef>
+          <a:fillRef idx="3">
+            <a:schemeClr val="accent1"/>
+          </a:fillRef>
+          <a:effectRef idx="2">
+            <a:schemeClr val="accent1"/>
+          </a:effectRef>
+          <a:fontRef idx="minor">
+            <a:schemeClr val="lt1"/>
+          </a:fontRef>
+        </p:style>
+        <p:txBody>
+          <a:bodyPr rtlCol="0" anchor="ctr"/>
+          <a:lstStyle/>
+          <a:p>
+            <a:pPr algn="ctr"/>
+            <a:endParaRPr/>
+          </a:p>
+        </p:txBody>
+      </p:sp>
+      <p:sp>
+        <p:nvSpPr>
+          <p:cNvPr id="3" name="TextBox 2"/>
+          <p:cNvSpPr txBox="1"/>
+          <p:nvPr/>
+        </p:nvSpPr>
+        <p:spPr>
+          <a:xfrm>
+            <a:off x="411480" y="128016"/>
+            <a:ext cx="7863840" cy="274320"/>
+          </a:xfrm>
+          <a:prstGeom prst="rect">
+            <a:avLst/>
+          </a:prstGeom>
+          <a:noFill/>
+        </p:spPr>
+        <p:txBody>
+          <a:bodyPr wrap="square">
+            <a:spAutoFit/>
+          </a:bodyPr>
+          <a:lstStyle/>
+          <a:p>
+            <a:pPr algn="l"/>
+            <a:r>
+              <a:rPr sz="2400" b="1">
+                <a:solidFill>
+                  <a:srgbClr val="FFFFFF"/>
+                </a:solidFill>
+              </a:rPr>
+              <a:t>Кто такой стропальщик</a:t>
+            </a:r>
+          </a:p>
+        </p:txBody>
+      </p:sp>
+      <p:sp>
+        <p:nvSpPr>
+          <p:cNvPr id="4" name="Rounded Rectangle 3"/>
+          <p:cNvSpPr/>
+          <p:nvPr/>
+        </p:nvSpPr>
+        <p:spPr>
+          <a:xfrm>
+            <a:off x="10469880" y="128016"/>
+            <a:ext cx="1234440" cy="320040"/>
+          </a:xfrm>
+          <a:prstGeom prst="roundRect">
+            <a:avLst/>
+          </a:prstGeom>
+          <a:solidFill>
+            <a:srgbClr val="DE7436"/>
+          </a:solidFill>
+          <a:ln>
+            <a:noFill/>
+          </a:ln>
+        </p:spPr>
+        <p:style>
+          <a:lnRef idx="1">
+            <a:schemeClr val="accent1"/>
+          </a:lnRef>
+          <a:fillRef idx="3">
+            <a:schemeClr val="accent1"/>
+          </a:fillRef>
+          <a:effectRef idx="2">
+            <a:schemeClr val="accent1"/>
+          </a:effectRef>
+          <a:fontRef idx="minor">
+            <a:schemeClr val="lt1"/>
+          </a:fontRef>
+        </p:style>
+        <p:txBody>
+          <a:bodyPr rtlCol="0" anchor="ctr"/>
+          <a:lstStyle/>
+          <a:p>
+            <a:pPr algn="ctr"/>
+            <a:r>
+              <a:rPr sz="1600" b="1">
+                <a:solidFill>
+                  <a:srgbClr val="FFFFFF"/>
+                </a:solidFill>
+              </a:rPr>
+              <a:t>S004</a:t>
+            </a:r>
+          </a:p>
+        </p:txBody>
+      </p:sp>
+      <p:sp>
+        <p:nvSpPr>
+          <p:cNvPr id="5" name="TextBox 4"/>
+          <p:cNvSpPr txBox="1"/>
+          <p:nvPr/>
+        </p:nvSpPr>
+        <p:spPr>
+          <a:xfrm>
+            <a:off x="457200" y="749808"/>
+            <a:ext cx="5943600" cy="228600"/>
+          </a:xfrm>
+          <a:prstGeom prst="rect">
+            <a:avLst/>
+          </a:prstGeom>
+          <a:noFill/>
+        </p:spPr>
+        <p:txBody>
+          <a:bodyPr wrap="square">
+            <a:spAutoFit/>
+          </a:bodyPr>
+          <a:lstStyle/>
+          <a:p>
+            <a:pPr algn="l"/>
+            <a:r>
+              <a:rPr sz="1100" b="0">
+                <a:solidFill>
+                  <a:srgbClr val="6E7A86"/>
+                </a:solidFill>
+              </a:rPr>
+              <a:t>Тема 1 • общая часть</a:t>
+            </a:r>
+          </a:p>
+        </p:txBody>
+      </p:sp>
+      <p:sp>
+        <p:nvSpPr>
+          <p:cNvPr id="6" name="Rounded Rectangle 5"/>
+          <p:cNvSpPr/>
+          <p:nvPr/>
+        </p:nvSpPr>
+        <p:spPr>
+          <a:xfrm>
+            <a:off x="640080" y="1325880"/>
+            <a:ext cx="5303520" cy="4297680"/>
+          </a:xfrm>
+          <a:prstGeom prst="roundRect">
+            <a:avLst/>
+          </a:prstGeom>
+          <a:solidFill>
+            <a:srgbClr val="FFFFFF"/>
+          </a:solidFill>
+          <a:ln w="19050">
+            <a:solidFill>
+              <a:srgbClr val="265A89"/>
+            </a:solidFill>
+          </a:ln>
+        </p:spPr>
+        <p:style>
+          <a:lnRef idx="1">
+            <a:schemeClr val="accent1"/>
+          </a:lnRef>
+          <a:fillRef idx="3">
+            <a:schemeClr val="accent1"/>
+          </a:fillRef>
+          <a:effectRef idx="2">
+            <a:schemeClr val="accent1"/>
+          </a:effectRef>
+          <a:fontRef idx="minor">
+            <a:schemeClr val="lt1"/>
+          </a:fontRef>
+        </p:style>
+        <p:txBody>
+          <a:bodyPr rtlCol="0" anchor="ctr"/>
+          <a:lstStyle/>
+          <a:p>
+            <a:pPr algn="ctr"/>
+            <a:endParaRPr/>
+          </a:p>
+        </p:txBody>
+      </p:sp>
+      <p:sp>
+        <p:nvSpPr>
+          <p:cNvPr id="7" name="Rounded Rectangle 6"/>
+          <p:cNvSpPr/>
+          <p:nvPr/>
+        </p:nvSpPr>
+        <p:spPr>
+          <a:xfrm>
+            <a:off x="640080" y="1325880"/>
+            <a:ext cx="5303520" cy="658368"/>
+          </a:xfrm>
+          <a:prstGeom prst="roundRect">
+            <a:avLst/>
+          </a:prstGeom>
+          <a:solidFill>
+            <a:srgbClr val="265A89"/>
+          </a:solidFill>
+          <a:ln>
+            <a:solidFill>
+              <a:srgbClr val="265A89"/>
+            </a:solidFill>
+          </a:ln>
+        </p:spPr>
+        <p:style>
+          <a:lnRef idx="1">
+            <a:schemeClr val="accent1"/>
+          </a:lnRef>
+          <a:fillRef idx="3">
+            <a:schemeClr val="accent1"/>
+          </a:fillRef>
+          <a:effectRef idx="2">
+            <a:schemeClr val="accent1"/>
+          </a:effectRef>
+          <a:fontRef idx="minor">
+            <a:schemeClr val="lt1"/>
+          </a:fontRef>
+        </p:style>
+        <p:txBody>
+          <a:bodyPr rtlCol="0" anchor="ctr"/>
+          <a:lstStyle/>
+          <a:p>
+            <a:pPr algn="ctr"/>
+            <a:r>
+              <a:rPr sz="2200" b="1">
+                <a:solidFill>
+                  <a:srgbClr val="FFFFFF"/>
+                </a:solidFill>
+              </a:rPr>
+              <a:t>Основные действия</a:t>
+            </a:r>
+          </a:p>
+        </p:txBody>
+      </p:sp>
+      <p:sp>
+        <p:nvSpPr>
+          <p:cNvPr id="8" name="TextBox 7"/>
+          <p:cNvSpPr txBox="1"/>
+          <p:nvPr/>
+        </p:nvSpPr>
+        <p:spPr>
+          <a:xfrm>
+            <a:off x="896112" y="2240280"/>
+            <a:ext cx="4791456" cy="3200400"/>
+          </a:xfrm>
+          <a:prstGeom prst="rect">
+            <a:avLst/>
+          </a:prstGeom>
+          <a:noFill/>
+        </p:spPr>
+        <p:txBody>
+          <a:bodyPr wrap="square">
+            <a:spAutoFit/>
+          </a:bodyPr>
+          <a:lstStyle/>
+          <a:p>
+            <a:pPr>
+              <a:spcAft>
+                <a:spcPts val="800"/>
+              </a:spcAft>
+            </a:pPr>
+            <a:r>
+              <a:rPr sz="1700">
+                <a:solidFill>
+                  <a:srgbClr val="212B36"/>
+                </a:solidFill>
+              </a:rPr>
+              <a:t>Подбирает и проверяет стропы.</a:t>
+            </a:r>
+          </a:p>
+          <a:p>
+            <a:pPr>
+              <a:spcAft>
+                <a:spcPts val="800"/>
+              </a:spcAft>
+            </a:pPr>
+            <a:r>
+              <a:rPr sz="1700">
+                <a:solidFill>
+                  <a:srgbClr val="212B36"/>
+                </a:solidFill>
+              </a:rPr>
+              <a:t>Стропит груз по схеме.</a:t>
+            </a:r>
+          </a:p>
+          <a:p>
+            <a:pPr>
+              <a:spcAft>
+                <a:spcPts val="800"/>
+              </a:spcAft>
+            </a:pPr>
+            <a:r>
+              <a:rPr sz="1700">
+                <a:solidFill>
+                  <a:srgbClr val="212B36"/>
+                </a:solidFill>
+              </a:rPr>
+              <a:t>Подает сигналы крановщику.</a:t>
+            </a:r>
+          </a:p>
+          <a:p>
+            <a:pPr>
+              <a:spcAft>
+                <a:spcPts val="800"/>
+              </a:spcAft>
+            </a:pPr>
+            <a:r>
+              <a:rPr sz="1700">
+                <a:solidFill>
+                  <a:srgbClr val="212B36"/>
+                </a:solidFill>
+              </a:rPr>
+              <a:t>Следит за безопасным перемещением груза.</a:t>
+            </a:r>
+          </a:p>
+        </p:txBody>
+      </p:sp>
+      <p:sp>
+        <p:nvSpPr>
+          <p:cNvPr id="9" name="Rounded Rectangle 8"/>
+          <p:cNvSpPr/>
+          <p:nvPr/>
+        </p:nvSpPr>
+        <p:spPr>
+          <a:xfrm>
+            <a:off x="6309360" y="1325880"/>
+            <a:ext cx="5212080" cy="4297680"/>
+          </a:xfrm>
+          <a:prstGeom prst="roundRect">
+            <a:avLst/>
+          </a:prstGeom>
+          <a:solidFill>
+            <a:srgbClr val="FFFFFF"/>
+          </a:solidFill>
+          <a:ln w="19050">
+            <a:solidFill>
+              <a:srgbClr val="42855F"/>
+            </a:solidFill>
+          </a:ln>
+        </p:spPr>
+        <p:style>
+          <a:lnRef idx="1">
+            <a:schemeClr val="accent1"/>
+          </a:lnRef>
+          <a:fillRef idx="3">
+            <a:schemeClr val="accent1"/>
+          </a:fillRef>
+          <a:effectRef idx="2">
+            <a:schemeClr val="accent1"/>
+          </a:effectRef>
+          <a:fontRef idx="minor">
+            <a:schemeClr val="lt1"/>
+          </a:fontRef>
+        </p:style>
+        <p:txBody>
+          <a:bodyPr rtlCol="0" anchor="ctr"/>
+          <a:lstStyle/>
+          <a:p>
+            <a:pPr algn="ctr"/>
+            <a:endParaRPr/>
+          </a:p>
+        </p:txBody>
+      </p:sp>
+      <p:sp>
+        <p:nvSpPr>
+          <p:cNvPr id="10" name="Rounded Rectangle 9"/>
+          <p:cNvSpPr/>
+          <p:nvPr/>
+        </p:nvSpPr>
+        <p:spPr>
+          <a:xfrm>
+            <a:off x="6309360" y="1325880"/>
+            <a:ext cx="5212080" cy="658368"/>
+          </a:xfrm>
+          <a:prstGeom prst="roundRect">
+            <a:avLst/>
+          </a:prstGeom>
+          <a:solidFill>
+            <a:srgbClr val="42855F"/>
+          </a:solidFill>
+          <a:ln>
+            <a:solidFill>
+              <a:srgbClr val="42855F"/>
+            </a:solidFill>
+          </a:ln>
+        </p:spPr>
+        <p:style>
+          <a:lnRef idx="1">
+            <a:schemeClr val="accent1"/>
+          </a:lnRef>
+          <a:fillRef idx="3">
+            <a:schemeClr val="accent1"/>
+          </a:fillRef>
+          <a:effectRef idx="2">
+            <a:schemeClr val="accent1"/>
+          </a:effectRef>
+          <a:fontRef idx="minor">
+            <a:schemeClr val="lt1"/>
+          </a:fontRef>
+        </p:style>
+        <p:txBody>
+          <a:bodyPr rtlCol="0" anchor="ctr"/>
+          <a:lstStyle/>
+          <a:p>
+            <a:pPr algn="ctr"/>
+            <a:r>
+              <a:rPr sz="2200" b="1">
+                <a:solidFill>
+                  <a:srgbClr val="FFFFFF"/>
+                </a:solidFill>
+              </a:rPr>
+              <a:t>Ответственность</a:t>
+            </a:r>
+          </a:p>
+        </p:txBody>
+      </p:sp>
+      <p:sp>
+        <p:nvSpPr>
+          <p:cNvPr id="11" name="TextBox 10"/>
+          <p:cNvSpPr txBox="1"/>
+          <p:nvPr/>
+        </p:nvSpPr>
+        <p:spPr>
+          <a:xfrm>
+            <a:off x="6565392" y="2240280"/>
+            <a:ext cx="4700016" cy="3200400"/>
+          </a:xfrm>
+          <a:prstGeom prst="rect">
+            <a:avLst/>
+          </a:prstGeom>
+          <a:noFill/>
+        </p:spPr>
+        <p:txBody>
+          <a:bodyPr wrap="square">
+            <a:spAutoFit/>
+          </a:bodyPr>
+          <a:lstStyle/>
+          <a:p>
+            <a:pPr>
+              <a:spcAft>
+                <a:spcPts val="800"/>
+              </a:spcAft>
+            </a:pPr>
+            <a:r>
+              <a:rPr sz="1700">
+                <a:solidFill>
+                  <a:srgbClr val="212B36"/>
+                </a:solidFill>
+              </a:rPr>
+              <a:t>Он отвечает не только за строп, но и за безопасность.</a:t>
+            </a:r>
+          </a:p>
+          <a:p>
+            <a:pPr>
+              <a:spcAft>
+                <a:spcPts val="800"/>
+              </a:spcAft>
+            </a:pPr>
+            <a:r>
+              <a:rPr sz="1700">
+                <a:solidFill>
+                  <a:srgbClr val="212B36"/>
+                </a:solidFill>
+              </a:rPr>
+              <a:t>Ошибка при строповке может привести к аварии.</a:t>
+            </a:r>
+          </a:p>
+          <a:p>
+            <a:pPr>
+              <a:spcAft>
+                <a:spcPts val="800"/>
+              </a:spcAft>
+            </a:pPr>
+            <a:r>
+              <a:rPr sz="1700">
+                <a:solidFill>
+                  <a:srgbClr val="212B36"/>
+                </a:solidFill>
+              </a:rPr>
+              <a:t>Поэтому все действия должны быть точными и по правилам.</a:t>
+            </a:r>
+          </a:p>
+        </p:txBody>
+      </p:sp>
+      <p:sp>
+        <p:nvSpPr>
+          <p:cNvPr id="12" name="Rounded Rectangle 11">
+            <a:hlinkClick r:id="rId2" action="ppaction://hlinksldjump"/>
+          </p:cNvPr>
+          <p:cNvSpPr/>
+          <p:nvPr/>
+        </p:nvSpPr>
+        <p:spPr>
+          <a:xfrm>
+            <a:off x="640080" y="5989320"/>
+            <a:ext cx="2148840" cy="457200"/>
+          </a:xfrm>
+          <a:prstGeom prst="roundRect">
+            <a:avLst/>
+          </a:prstGeom>
+          <a:solidFill>
+            <a:srgbClr val="537795"/>
+          </a:solidFill>
+          <a:ln>
+            <a:solidFill>
+              <a:srgbClr val="537795"/>
+            </a:solidFill>
+          </a:ln>
+        </p:spPr>
+        <p:style>
+          <a:lnRef idx="1">
+            <a:schemeClr val="accent1"/>
+          </a:lnRef>
+          <a:fillRef idx="3">
+            <a:schemeClr val="accent1"/>
+          </a:fillRef>
+          <a:effectRef idx="2">
+            <a:schemeClr val="accent1"/>
+          </a:effectRef>
+          <a:fontRef idx="minor">
+            <a:schemeClr val="lt1"/>
+          </a:fontRef>
+        </p:style>
+        <p:txBody>
+          <a:bodyPr rtlCol="0" anchor="ctr"/>
+          <a:lstStyle/>
+          <a:p>
+            <a:pPr algn="ctr"/>
+            <a:r>
+              <a:rPr sz="1800" b="1">
+                <a:solidFill>
+                  <a:srgbClr val="FFFFFF"/>
+                </a:solidFill>
+              </a:rPr>
+              <a:t>НАЗАД</a:t>
+            </a:r>
+          </a:p>
+        </p:txBody>
+      </p:sp>
+      <p:sp>
+        <p:nvSpPr>
+          <p:cNvPr id="13" name="Rounded Rectangle 12">
+            <a:hlinkClick r:id="rId3" action="ppaction://hlinksldjump"/>
+          </p:cNvPr>
+          <p:cNvSpPr/>
+          <p:nvPr/>
+        </p:nvSpPr>
+        <p:spPr>
+          <a:xfrm>
+            <a:off x="9372600" y="5989320"/>
+            <a:ext cx="2148840" cy="457200"/>
+          </a:xfrm>
+          <a:prstGeom prst="roundRect">
+            <a:avLst/>
+          </a:prstGeom>
+          <a:solidFill>
+            <a:srgbClr val="DE7436"/>
+          </a:solidFill>
+          <a:ln>
+            <a:solidFill>
+              <a:srgbClr val="DE7436"/>
+            </a:solidFill>
+          </a:ln>
+        </p:spPr>
+        <p:style>
+          <a:lnRef idx="1">
+            <a:schemeClr val="accent1"/>
+          </a:lnRef>
+          <a:fillRef idx="3">
+            <a:schemeClr val="accent1"/>
+          </a:fillRef>
+          <a:effectRef idx="2">
+            <a:schemeClr val="accent1"/>
+          </a:effectRef>
+          <a:fontRef idx="minor">
+            <a:schemeClr val="lt1"/>
+          </a:fontRef>
+        </p:style>
+        <p:txBody>
+          <a:bodyPr rtlCol="0" anchor="ctr"/>
+          <a:lstStyle/>
+          <a:p>
+            <a:pPr algn="ctr"/>
+            <a:r>
+              <a:rPr sz="1800" b="1">
+                <a:solidFill>
+                  <a:srgbClr val="FFFFFF"/>
+                </a:solidFill>
+              </a:rPr>
+              <a:t>ДАЛЕЕ</a:t>
+            </a:r>
+          </a:p>
+        </p:txBody>
+      </p:sp>
+    </p:spTree>
+  </p:cSld>
+  <p:clrMapOvr>
+    <a:masterClrMapping/>
+  </p:clrMapOvr>
+</p:sld>
+</file>
+
+<file path=ppt/slides/slide7.xml><?xml version="1.0" encoding="utf-8"?>
+<p:sld xmlns:a="http://schemas.openxmlformats.org/drawingml/2006/main" xmlns:r="http://schemas.openxmlformats.org/officeDocument/2006/relationships" xmlns:p="http://schemas.openxmlformats.org/presentationml/2006/main">
+  <p:cSld>
+    <p:bg>
+      <p:bgPr>
+        <a:solidFill>
+          <a:srgbClr val="F0F4F7"/>
+        </a:solidFill>
+        <a:effectLst/>
+      </p:bgPr>
+    </p:bg>
+    <p:spTree>
+      <p:nvGrpSpPr>
+        <p:cNvPr id="1" name=""/>
+        <p:cNvGrpSpPr/>
+        <p:nvPr/>
+      </p:nvGrpSpPr>
+      <p:grpSpPr>
+        <a:xfrm>
+          <a:off x="0" y="0"/>
+          <a:ext cx="0" cy="0"/>
+          <a:chOff x="0" y="0"/>
+          <a:chExt cx="0" cy="0"/>
+        </a:xfrm>
+      </p:grpSpPr>
+      <p:sp>
+        <p:nvSpPr>
+          <p:cNvPr id="2" name="Rectangle 1"/>
+          <p:cNvSpPr/>
+          <p:nvPr/>
+        </p:nvSpPr>
+        <p:spPr>
+          <a:xfrm>
+            <a:off x="0" y="0"/>
+            <a:ext cx="12191695" cy="658368"/>
+          </a:xfrm>
+          <a:prstGeom prst="rect">
+            <a:avLst/>
+          </a:prstGeom>
+          <a:solidFill>
+            <a:srgbClr val="122B42"/>
+          </a:solidFill>
+          <a:ln>
+            <a:noFill/>
+          </a:ln>
+        </p:spPr>
+        <p:style>
+          <a:lnRef idx="1">
+            <a:schemeClr val="accent1"/>
+          </a:lnRef>
+          <a:fillRef idx="3">
+            <a:schemeClr val="accent1"/>
+          </a:fillRef>
+          <a:effectRef idx="2">
+            <a:schemeClr val="accent1"/>
+          </a:effectRef>
+          <a:fontRef idx="minor">
+            <a:schemeClr val="lt1"/>
+          </a:fontRef>
+        </p:style>
+        <p:txBody>
+          <a:bodyPr rtlCol="0" anchor="ctr"/>
+          <a:lstStyle/>
+          <a:p>
+            <a:pPr algn="ctr"/>
+            <a:endParaRPr/>
+          </a:p>
+        </p:txBody>
+      </p:sp>
+      <p:sp>
+        <p:nvSpPr>
+          <p:cNvPr id="3" name="TextBox 2"/>
+          <p:cNvSpPr txBox="1"/>
+          <p:nvPr/>
+        </p:nvSpPr>
+        <p:spPr>
+          <a:xfrm>
+            <a:off x="411480" y="128016"/>
+            <a:ext cx="7863840" cy="274320"/>
+          </a:xfrm>
+          <a:prstGeom prst="rect">
+            <a:avLst/>
+          </a:prstGeom>
+          <a:noFill/>
+        </p:spPr>
+        <p:txBody>
+          <a:bodyPr wrap="square">
+            <a:spAutoFit/>
+          </a:bodyPr>
+          <a:lstStyle/>
+          <a:p>
+            <a:pPr algn="l"/>
+            <a:r>
+              <a:rPr sz="2400" b="1">
+                <a:solidFill>
+                  <a:srgbClr val="FFFFFF"/>
+                </a:solidFill>
+              </a:rPr>
+              <a:t>Кто может работать стропальщиком</a:t>
+            </a:r>
+          </a:p>
+        </p:txBody>
+      </p:sp>
+      <p:sp>
+        <p:nvSpPr>
+          <p:cNvPr id="4" name="Rounded Rectangle 3"/>
+          <p:cNvSpPr/>
+          <p:nvPr/>
+        </p:nvSpPr>
+        <p:spPr>
+          <a:xfrm>
+            <a:off x="10469880" y="128016"/>
+            <a:ext cx="1234440" cy="320040"/>
+          </a:xfrm>
+          <a:prstGeom prst="roundRect">
+            <a:avLst/>
+          </a:prstGeom>
+          <a:solidFill>
+            <a:srgbClr val="DE7436"/>
+          </a:solidFill>
+          <a:ln>
+            <a:noFill/>
+          </a:ln>
+        </p:spPr>
+        <p:style>
+          <a:lnRef idx="1">
+            <a:schemeClr val="accent1"/>
+          </a:lnRef>
+          <a:fillRef idx="3">
+            <a:schemeClr val="accent1"/>
+          </a:fillRef>
+          <a:effectRef idx="2">
+            <a:schemeClr val="accent1"/>
+          </a:effectRef>
+          <a:fontRef idx="minor">
+            <a:schemeClr val="lt1"/>
+          </a:fontRef>
+        </p:style>
+        <p:txBody>
+          <a:bodyPr rtlCol="0" anchor="ctr"/>
+          <a:lstStyle/>
+          <a:p>
+            <a:pPr algn="ctr"/>
+            <a:r>
+              <a:rPr sz="1600" b="1">
+                <a:solidFill>
+                  <a:srgbClr val="FFFFFF"/>
+                </a:solidFill>
+              </a:rPr>
+              <a:t>S005</a:t>
+            </a:r>
+          </a:p>
+        </p:txBody>
+      </p:sp>
+      <p:sp>
+        <p:nvSpPr>
+          <p:cNvPr id="5" name="TextBox 4"/>
+          <p:cNvSpPr txBox="1"/>
+          <p:nvPr/>
+        </p:nvSpPr>
+        <p:spPr>
+          <a:xfrm>
+            <a:off x="457200" y="749808"/>
+            <a:ext cx="5943600" cy="228600"/>
+          </a:xfrm>
+          <a:prstGeom prst="rect">
+            <a:avLst/>
+          </a:prstGeom>
+          <a:noFill/>
+        </p:spPr>
+        <p:txBody>
+          <a:bodyPr wrap="square">
+            <a:spAutoFit/>
+          </a:bodyPr>
+          <a:lstStyle/>
+          <a:p>
+            <a:pPr algn="l"/>
+            <a:r>
+              <a:rPr sz="1100" b="0">
+                <a:solidFill>
+                  <a:srgbClr val="6E7A86"/>
+                </a:solidFill>
+              </a:rPr>
+              <a:t>Тема 1 • общая часть</a:t>
+            </a:r>
+          </a:p>
+        </p:txBody>
+      </p:sp>
+      <p:sp>
+        <p:nvSpPr>
+          <p:cNvPr id="6" name="Rounded Rectangle 5"/>
+          <p:cNvSpPr/>
+          <p:nvPr/>
+        </p:nvSpPr>
+        <p:spPr>
+          <a:xfrm>
+            <a:off x="640080" y="1325880"/>
+            <a:ext cx="5303520" cy="4297680"/>
+          </a:xfrm>
+          <a:prstGeom prst="roundRect">
+            <a:avLst/>
+          </a:prstGeom>
+          <a:solidFill>
+            <a:srgbClr val="FFFFFF"/>
+          </a:solidFill>
+          <a:ln w="19050">
+            <a:solidFill>
+              <a:srgbClr val="265A89"/>
+            </a:solidFill>
+          </a:ln>
+        </p:spPr>
+        <p:style>
+          <a:lnRef idx="1">
+            <a:schemeClr val="accent1"/>
+          </a:lnRef>
+          <a:fillRef idx="3">
+            <a:schemeClr val="accent1"/>
+          </a:fillRef>
+          <a:effectRef idx="2">
+            <a:schemeClr val="accent1"/>
+          </a:effectRef>
+          <a:fontRef idx="minor">
+            <a:schemeClr val="lt1"/>
+          </a:fontRef>
+        </p:style>
+        <p:txBody>
+          <a:bodyPr rtlCol="0" anchor="ctr"/>
+          <a:lstStyle/>
+          <a:p>
+            <a:pPr algn="ctr"/>
+            <a:endParaRPr/>
+          </a:p>
+        </p:txBody>
+      </p:sp>
+      <p:sp>
+        <p:nvSpPr>
+          <p:cNvPr id="7" name="Rounded Rectangle 6"/>
+          <p:cNvSpPr/>
+          <p:nvPr/>
+        </p:nvSpPr>
+        <p:spPr>
+          <a:xfrm>
+            <a:off x="640080" y="1325880"/>
+            <a:ext cx="5303520" cy="658368"/>
+          </a:xfrm>
+          <a:prstGeom prst="roundRect">
+            <a:avLst/>
+          </a:prstGeom>
+          <a:solidFill>
+            <a:srgbClr val="265A89"/>
+          </a:solidFill>
+          <a:ln>
+            <a:solidFill>
+              <a:srgbClr val="265A89"/>
+            </a:solidFill>
+          </a:ln>
+        </p:spPr>
+        <p:style>
+          <a:lnRef idx="1">
+            <a:schemeClr val="accent1"/>
+          </a:lnRef>
+          <a:fillRef idx="3">
+            <a:schemeClr val="accent1"/>
+          </a:fillRef>
+          <a:effectRef idx="2">
+            <a:schemeClr val="accent1"/>
+          </a:effectRef>
+          <a:fontRef idx="minor">
+            <a:schemeClr val="lt1"/>
+          </a:fontRef>
+        </p:style>
+        <p:txBody>
+          <a:bodyPr rtlCol="0" anchor="ctr"/>
+          <a:lstStyle/>
+          <a:p>
+            <a:pPr algn="ctr"/>
+            <a:r>
+              <a:rPr sz="2200" b="1">
+                <a:solidFill>
+                  <a:srgbClr val="FFFFFF"/>
+                </a:solidFill>
+              </a:rPr>
+              <a:t>Допуск к работе</a:t>
+            </a:r>
+          </a:p>
+        </p:txBody>
+      </p:sp>
+      <p:sp>
+        <p:nvSpPr>
+          <p:cNvPr id="8" name="TextBox 7"/>
+          <p:cNvSpPr txBox="1"/>
+          <p:nvPr/>
+        </p:nvSpPr>
+        <p:spPr>
+          <a:xfrm>
+            <a:off x="896112" y="2240280"/>
+            <a:ext cx="4791456" cy="3200400"/>
+          </a:xfrm>
+          <a:prstGeom prst="rect">
+            <a:avLst/>
+          </a:prstGeom>
+          <a:noFill/>
+        </p:spPr>
+        <p:txBody>
+          <a:bodyPr wrap="square">
+            <a:spAutoFit/>
+          </a:bodyPr>
+          <a:lstStyle/>
+          <a:p>
+            <a:pPr>
+              <a:spcAft>
+                <a:spcPts val="800"/>
+              </a:spcAft>
+            </a:pPr>
+            <a:r>
+              <a:rPr sz="1700">
+                <a:solidFill>
+                  <a:srgbClr val="212B36"/>
+                </a:solidFill>
+              </a:rPr>
+              <a:t>Прошел обучение.</a:t>
+            </a:r>
+          </a:p>
+          <a:p>
+            <a:pPr>
+              <a:spcAft>
+                <a:spcPts val="800"/>
+              </a:spcAft>
+            </a:pPr>
+            <a:r>
+              <a:rPr sz="1700">
+                <a:solidFill>
+                  <a:srgbClr val="212B36"/>
+                </a:solidFill>
+              </a:rPr>
+              <a:t>Прошел инструктаж.</a:t>
+            </a:r>
+          </a:p>
+          <a:p>
+            <a:pPr>
+              <a:spcAft>
+                <a:spcPts val="800"/>
+              </a:spcAft>
+            </a:pPr>
+            <a:r>
+              <a:rPr sz="1700">
+                <a:solidFill>
+                  <a:srgbClr val="212B36"/>
+                </a:solidFill>
+              </a:rPr>
+              <a:t>Сдал проверку знаний.</a:t>
+            </a:r>
+          </a:p>
+          <a:p>
+            <a:pPr>
+              <a:spcAft>
+                <a:spcPts val="800"/>
+              </a:spcAft>
+            </a:pPr>
+            <a:r>
+              <a:rPr sz="1700">
+                <a:solidFill>
+                  <a:srgbClr val="212B36"/>
+                </a:solidFill>
+              </a:rPr>
+              <a:t>Получил допуск работодателя.</a:t>
+            </a:r>
+          </a:p>
+          <a:p>
+            <a:pPr>
+              <a:spcAft>
+                <a:spcPts val="800"/>
+              </a:spcAft>
+            </a:pPr>
+            <a:r>
+              <a:rPr sz="1700">
+                <a:solidFill>
+                  <a:srgbClr val="212B36"/>
+                </a:solidFill>
+              </a:rPr>
+              <a:t>Использует СИЗ.</a:t>
+            </a:r>
+          </a:p>
+        </p:txBody>
+      </p:sp>
+      <p:sp>
+        <p:nvSpPr>
+          <p:cNvPr id="9" name="Rounded Rectangle 8"/>
+          <p:cNvSpPr/>
+          <p:nvPr/>
+        </p:nvSpPr>
+        <p:spPr>
+          <a:xfrm>
+            <a:off x="6309360" y="1325880"/>
+            <a:ext cx="5212080" cy="4297680"/>
+          </a:xfrm>
+          <a:prstGeom prst="roundRect">
+            <a:avLst/>
+          </a:prstGeom>
+          <a:solidFill>
+            <a:srgbClr val="FFFFFF"/>
+          </a:solidFill>
+          <a:ln w="19050">
+            <a:solidFill>
+              <a:srgbClr val="42855F"/>
+            </a:solidFill>
+          </a:ln>
+        </p:spPr>
+        <p:style>
+          <a:lnRef idx="1">
+            <a:schemeClr val="accent1"/>
+          </a:lnRef>
+          <a:fillRef idx="3">
+            <a:schemeClr val="accent1"/>
+          </a:fillRef>
+          <a:effectRef idx="2">
+            <a:schemeClr val="accent1"/>
+          </a:effectRef>
+          <a:fontRef idx="minor">
+            <a:schemeClr val="lt1"/>
+          </a:fontRef>
+        </p:style>
+        <p:txBody>
+          <a:bodyPr rtlCol="0" anchor="ctr"/>
+          <a:lstStyle/>
+          <a:p>
+            <a:pPr algn="ctr"/>
+            <a:endParaRPr/>
+          </a:p>
+        </p:txBody>
+      </p:sp>
+      <p:sp>
+        <p:nvSpPr>
+          <p:cNvPr id="10" name="Rounded Rectangle 9"/>
+          <p:cNvSpPr/>
+          <p:nvPr/>
+        </p:nvSpPr>
+        <p:spPr>
+          <a:xfrm>
+            <a:off x="6309360" y="1325880"/>
+            <a:ext cx="5212080" cy="658368"/>
+          </a:xfrm>
+          <a:prstGeom prst="roundRect">
+            <a:avLst/>
+          </a:prstGeom>
+          <a:solidFill>
+            <a:srgbClr val="42855F"/>
+          </a:solidFill>
+          <a:ln>
+            <a:solidFill>
+              <a:srgbClr val="42855F"/>
+            </a:solidFill>
+          </a:ln>
+        </p:spPr>
+        <p:style>
+          <a:lnRef idx="1">
+            <a:schemeClr val="accent1"/>
+          </a:lnRef>
+          <a:fillRef idx="3">
+            <a:schemeClr val="accent1"/>
+          </a:fillRef>
+          <a:effectRef idx="2">
+            <a:schemeClr val="accent1"/>
+          </a:effectRef>
+          <a:fontRef idx="minor">
+            <a:schemeClr val="lt1"/>
+          </a:fontRef>
+        </p:style>
+        <p:txBody>
+          <a:bodyPr rtlCol="0" anchor="ctr"/>
+          <a:lstStyle/>
+          <a:p>
+            <a:pPr algn="ctr"/>
+            <a:r>
+              <a:rPr sz="2200" b="1">
+                <a:solidFill>
+                  <a:srgbClr val="FFFFFF"/>
+                </a:solidFill>
+              </a:rPr>
+              <a:t>Важный вывод</a:t>
+            </a:r>
+          </a:p>
+        </p:txBody>
+      </p:sp>
+      <p:sp>
+        <p:nvSpPr>
+          <p:cNvPr id="11" name="TextBox 10"/>
+          <p:cNvSpPr txBox="1"/>
+          <p:nvPr/>
+        </p:nvSpPr>
+        <p:spPr>
+          <a:xfrm>
+            <a:off x="6565392" y="2240280"/>
+            <a:ext cx="4700016" cy="3200400"/>
+          </a:xfrm>
+          <a:prstGeom prst="rect">
+            <a:avLst/>
+          </a:prstGeom>
+          <a:noFill/>
+        </p:spPr>
+        <p:txBody>
+          <a:bodyPr wrap="square">
+            <a:spAutoFit/>
+          </a:bodyPr>
+          <a:lstStyle/>
+          <a:p>
+            <a:pPr>
+              <a:spcAft>
+                <a:spcPts val="800"/>
+              </a:spcAft>
+            </a:pPr>
+            <a:r>
+              <a:rPr sz="1700">
+                <a:solidFill>
+                  <a:srgbClr val="212B36"/>
+                </a:solidFill>
+              </a:rPr>
+              <a:t>Допуск к работе - это не формальность.</a:t>
+            </a:r>
+          </a:p>
+          <a:p>
+            <a:pPr>
+              <a:spcAft>
+                <a:spcPts val="800"/>
+              </a:spcAft>
+            </a:pPr>
+            <a:r>
+              <a:rPr sz="1700">
+                <a:solidFill>
+                  <a:srgbClr val="212B36"/>
+                </a:solidFill>
+              </a:rPr>
+              <a:t>Без подготовки и проверки знаний работать нельзя.</a:t>
+            </a:r>
+          </a:p>
+          <a:p>
+            <a:pPr>
+              <a:spcAft>
+                <a:spcPts val="800"/>
+              </a:spcAft>
+            </a:pPr>
+            <a:r>
+              <a:rPr sz="1700">
+                <a:solidFill>
+                  <a:srgbClr val="212B36"/>
+                </a:solidFill>
+              </a:rPr>
+              <a:t>Безопасная работа начинается с допуска.</a:t>
+            </a:r>
+          </a:p>
+        </p:txBody>
+      </p:sp>
+      <p:sp>
+        <p:nvSpPr>
+          <p:cNvPr id="12" name="Rounded Rectangle 11">
+            <a:hlinkClick r:id="rId2" action="ppaction://hlinksldjump"/>
+          </p:cNvPr>
+          <p:cNvSpPr/>
+          <p:nvPr/>
+        </p:nvSpPr>
+        <p:spPr>
+          <a:xfrm>
+            <a:off x="640080" y="5989320"/>
+            <a:ext cx="2148840" cy="457200"/>
+          </a:xfrm>
+          <a:prstGeom prst="roundRect">
+            <a:avLst/>
+          </a:prstGeom>
+          <a:solidFill>
+            <a:srgbClr val="537795"/>
+          </a:solidFill>
+          <a:ln>
+            <a:solidFill>
+              <a:srgbClr val="537795"/>
+            </a:solidFill>
+          </a:ln>
+        </p:spPr>
+        <p:style>
+          <a:lnRef idx="1">
+            <a:schemeClr val="accent1"/>
+          </a:lnRef>
+          <a:fillRef idx="3">
+            <a:schemeClr val="accent1"/>
+          </a:fillRef>
+          <a:effectRef idx="2">
+            <a:schemeClr val="accent1"/>
+          </a:effectRef>
+          <a:fontRef idx="minor">
+            <a:schemeClr val="lt1"/>
+          </a:fontRef>
+        </p:style>
+        <p:txBody>
+          <a:bodyPr rtlCol="0" anchor="ctr"/>
+          <a:lstStyle/>
+          <a:p>
+            <a:pPr algn="ctr"/>
+            <a:r>
+              <a:rPr sz="1800" b="1">
+                <a:solidFill>
+                  <a:srgbClr val="FFFFFF"/>
+                </a:solidFill>
+              </a:rPr>
+              <a:t>НАЗАД</a:t>
+            </a:r>
+          </a:p>
+        </p:txBody>
+      </p:sp>
+      <p:sp>
+        <p:nvSpPr>
+          <p:cNvPr id="13" name="Rounded Rectangle 12">
+            <a:hlinkClick r:id="rId3" action="ppaction://hlinksldjump"/>
+          </p:cNvPr>
+          <p:cNvSpPr/>
+          <p:nvPr/>
+        </p:nvSpPr>
+        <p:spPr>
+          <a:xfrm>
+            <a:off x="9372600" y="5989320"/>
+            <a:ext cx="2148840" cy="457200"/>
+          </a:xfrm>
+          <a:prstGeom prst="roundRect">
+            <a:avLst/>
+          </a:prstGeom>
+          <a:solidFill>
+            <a:srgbClr val="DE7436"/>
+          </a:solidFill>
+          <a:ln>
+            <a:solidFill>
+              <a:srgbClr val="DE7436"/>
+            </a:solidFill>
+          </a:ln>
+        </p:spPr>
+        <p:style>
+          <a:lnRef idx="1">
+            <a:schemeClr val="accent1"/>
+          </a:lnRef>
+          <a:fillRef idx="3">
+            <a:schemeClr val="accent1"/>
+          </a:fillRef>
+          <a:effectRef idx="2">
+            <a:schemeClr val="accent1"/>
+          </a:effectRef>
+          <a:fontRef idx="minor">
+            <a:schemeClr val="lt1"/>
+          </a:fontRef>
+        </p:style>
+        <p:txBody>
+          <a:bodyPr rtlCol="0" anchor="ctr"/>
+          <a:lstStyle/>
+          <a:p>
+            <a:pPr algn="ctr"/>
+            <a:r>
+              <a:rPr sz="1800" b="1">
+                <a:solidFill>
+                  <a:srgbClr val="FFFFFF"/>
+                </a:solidFill>
+              </a:rPr>
+              <a:t>ДАЛЕЕ</a:t>
+            </a:r>
+          </a:p>
+        </p:txBody>
+      </p:sp>
+    </p:spTree>
+  </p:cSld>
+  <p:clrMapOvr>
+    <a:masterClrMapping/>
+  </p:clrMapOvr>
+</p:sld>
+</file>
+
+<file path=ppt/slides/slide8.xml><?xml version="1.0" encoding="utf-8"?>
+<p:sld xmlns:a="http://schemas.openxmlformats.org/drawingml/2006/main" xmlns:r="http://schemas.openxmlformats.org/officeDocument/2006/relationships" xmlns:p="http://schemas.openxmlformats.org/presentationml/2006/main">
+  <p:cSld>
+    <p:bg>
+      <p:bgPr>
+        <a:solidFill>
+          <a:srgbClr val="F0F4F7"/>
+        </a:solidFill>
+        <a:effectLst/>
+      </p:bgPr>
+    </p:bg>
+    <p:spTree>
+      <p:nvGrpSpPr>
+        <p:cNvPr id="1" name=""/>
+        <p:cNvGrpSpPr/>
+        <p:nvPr/>
+      </p:nvGrpSpPr>
+      <p:grpSpPr>
+        <a:xfrm>
+          <a:off x="0" y="0"/>
+          <a:ext cx="0" cy="0"/>
+          <a:chOff x="0" y="0"/>
+          <a:chExt cx="0" cy="0"/>
+        </a:xfrm>
+      </p:grpSpPr>
+      <p:sp>
+        <p:nvSpPr>
+          <p:cNvPr id="2" name="Rectangle 1"/>
+          <p:cNvSpPr/>
+          <p:nvPr/>
+        </p:nvSpPr>
+        <p:spPr>
+          <a:xfrm>
+            <a:off x="0" y="0"/>
+            <a:ext cx="12191695" cy="658368"/>
+          </a:xfrm>
+          <a:prstGeom prst="rect">
+            <a:avLst/>
+          </a:prstGeom>
+          <a:solidFill>
+            <a:srgbClr val="122B42"/>
+          </a:solidFill>
+          <a:ln>
+            <a:noFill/>
+          </a:ln>
+        </p:spPr>
+        <p:style>
+          <a:lnRef idx="1">
+            <a:schemeClr val="accent1"/>
+          </a:lnRef>
+          <a:fillRef idx="3">
+            <a:schemeClr val="accent1"/>
+          </a:fillRef>
+          <a:effectRef idx="2">
+            <a:schemeClr val="accent1"/>
+          </a:effectRef>
+          <a:fontRef idx="minor">
+            <a:schemeClr val="lt1"/>
+          </a:fontRef>
+        </p:style>
+        <p:txBody>
+          <a:bodyPr rtlCol="0" anchor="ctr"/>
+          <a:lstStyle/>
+          <a:p>
+            <a:pPr algn="ctr"/>
+            <a:endParaRPr/>
+          </a:p>
+        </p:txBody>
+      </p:sp>
+      <p:sp>
+        <p:nvSpPr>
+          <p:cNvPr id="3" name="TextBox 2"/>
+          <p:cNvSpPr txBox="1"/>
+          <p:nvPr/>
+        </p:nvSpPr>
+        <p:spPr>
+          <a:xfrm>
+            <a:off x="411480" y="128016"/>
+            <a:ext cx="7863840" cy="274320"/>
+          </a:xfrm>
+          <a:prstGeom prst="rect">
+            <a:avLst/>
+          </a:prstGeom>
+          <a:noFill/>
+        </p:spPr>
+        <p:txBody>
+          <a:bodyPr wrap="square">
+            <a:spAutoFit/>
+          </a:bodyPr>
+          <a:lstStyle/>
+          <a:p>
+            <a:pPr algn="l"/>
+            <a:r>
+              <a:rPr sz="2400" b="1">
+                <a:solidFill>
+                  <a:srgbClr val="FFFFFF"/>
+                </a:solidFill>
+              </a:rPr>
+              <a:t>Разряды 2-4</a:t>
+            </a:r>
+          </a:p>
+        </p:txBody>
+      </p:sp>
+      <p:sp>
+        <p:nvSpPr>
+          <p:cNvPr id="4" name="Rounded Rectangle 3"/>
+          <p:cNvSpPr/>
+          <p:nvPr/>
+        </p:nvSpPr>
+        <p:spPr>
+          <a:xfrm>
+            <a:off x="10469880" y="128016"/>
+            <a:ext cx="1234440" cy="320040"/>
+          </a:xfrm>
+          <a:prstGeom prst="roundRect">
+            <a:avLst/>
+          </a:prstGeom>
+          <a:solidFill>
+            <a:srgbClr val="DE7436"/>
+          </a:solidFill>
+          <a:ln>
+            <a:noFill/>
+          </a:ln>
+        </p:spPr>
+        <p:style>
+          <a:lnRef idx="1">
+            <a:schemeClr val="accent1"/>
+          </a:lnRef>
+          <a:fillRef idx="3">
+            <a:schemeClr val="accent1"/>
+          </a:fillRef>
+          <a:effectRef idx="2">
+            <a:schemeClr val="accent1"/>
+          </a:effectRef>
+          <a:fontRef idx="minor">
+            <a:schemeClr val="lt1"/>
+          </a:fontRef>
+        </p:style>
+        <p:txBody>
+          <a:bodyPr rtlCol="0" anchor="ctr"/>
+          <a:lstStyle/>
+          <a:p>
+            <a:pPr algn="ctr"/>
+            <a:r>
+              <a:rPr sz="1600" b="1">
+                <a:solidFill>
+                  <a:srgbClr val="FFFFFF"/>
+                </a:solidFill>
+              </a:rPr>
+              <a:t>S006</a:t>
+            </a:r>
+          </a:p>
+        </p:txBody>
+      </p:sp>
+      <p:sp>
+        <p:nvSpPr>
+          <p:cNvPr id="5" name="TextBox 4"/>
+          <p:cNvSpPr txBox="1"/>
+          <p:nvPr/>
+        </p:nvSpPr>
+        <p:spPr>
+          <a:xfrm>
+            <a:off x="457200" y="749808"/>
+            <a:ext cx="5943600" cy="228600"/>
+          </a:xfrm>
+          <a:prstGeom prst="rect">
+            <a:avLst/>
+          </a:prstGeom>
+          <a:noFill/>
+        </p:spPr>
+        <p:txBody>
+          <a:bodyPr wrap="square">
+            <a:spAutoFit/>
+          </a:bodyPr>
+          <a:lstStyle/>
+          <a:p>
+            <a:pPr algn="l"/>
+            <a:r>
+              <a:rPr sz="1100" b="0">
+                <a:solidFill>
+                  <a:srgbClr val="6E7A86"/>
+                </a:solidFill>
+              </a:rPr>
+              <a:t>Тема 1 • общая часть</a:t>
+            </a:r>
+          </a:p>
+        </p:txBody>
+      </p:sp>
+      <p:sp>
+        <p:nvSpPr>
+          <p:cNvPr id="6" name="Rounded Rectangle 5"/>
+          <p:cNvSpPr/>
+          <p:nvPr/>
+        </p:nvSpPr>
+        <p:spPr>
+          <a:xfrm>
+            <a:off x="640080" y="1325880"/>
+            <a:ext cx="5303520" cy="4297680"/>
+          </a:xfrm>
+          <a:prstGeom prst="roundRect">
+            <a:avLst/>
+          </a:prstGeom>
+          <a:solidFill>
+            <a:srgbClr val="FFFFFF"/>
+          </a:solidFill>
+          <a:ln w="19050">
+            <a:solidFill>
+              <a:srgbClr val="265A89"/>
+            </a:solidFill>
+          </a:ln>
+        </p:spPr>
+        <p:style>
+          <a:lnRef idx="1">
+            <a:schemeClr val="accent1"/>
+          </a:lnRef>
+          <a:fillRef idx="3">
+            <a:schemeClr val="accent1"/>
+          </a:fillRef>
+          <a:effectRef idx="2">
+            <a:schemeClr val="accent1"/>
+          </a:effectRef>
+          <a:fontRef idx="minor">
+            <a:schemeClr val="lt1"/>
+          </a:fontRef>
+        </p:style>
+        <p:txBody>
+          <a:bodyPr rtlCol="0" anchor="ctr"/>
+          <a:lstStyle/>
+          <a:p>
+            <a:pPr algn="ctr"/>
+            <a:endParaRPr/>
+          </a:p>
+        </p:txBody>
+      </p:sp>
+      <p:sp>
+        <p:nvSpPr>
+          <p:cNvPr id="7" name="Rounded Rectangle 6"/>
+          <p:cNvSpPr/>
+          <p:nvPr/>
+        </p:nvSpPr>
+        <p:spPr>
+          <a:xfrm>
+            <a:off x="640080" y="1325880"/>
+            <a:ext cx="5303520" cy="658368"/>
+          </a:xfrm>
+          <a:prstGeom prst="roundRect">
+            <a:avLst/>
+          </a:prstGeom>
+          <a:solidFill>
+            <a:srgbClr val="265A89"/>
+          </a:solidFill>
+          <a:ln>
+            <a:solidFill>
+              <a:srgbClr val="265A89"/>
+            </a:solidFill>
+          </a:ln>
+        </p:spPr>
+        <p:style>
+          <a:lnRef idx="1">
+            <a:schemeClr val="accent1"/>
+          </a:lnRef>
+          <a:fillRef idx="3">
+            <a:schemeClr val="accent1"/>
+          </a:fillRef>
+          <a:effectRef idx="2">
+            <a:schemeClr val="accent1"/>
+          </a:effectRef>
+          <a:fontRef idx="minor">
+            <a:schemeClr val="lt1"/>
+          </a:fontRef>
+        </p:style>
+        <p:txBody>
+          <a:bodyPr rtlCol="0" anchor="ctr"/>
+          <a:lstStyle/>
+          <a:p>
+            <a:pPr algn="ctr"/>
+            <a:r>
+              <a:rPr sz="2200" b="1">
+                <a:solidFill>
+                  <a:srgbClr val="FFFFFF"/>
+                </a:solidFill>
+              </a:rPr>
+              <a:t>Что входит в курс</a:t>
+            </a:r>
+          </a:p>
+        </p:txBody>
+      </p:sp>
+      <p:sp>
+        <p:nvSpPr>
+          <p:cNvPr id="8" name="TextBox 7"/>
+          <p:cNvSpPr txBox="1"/>
+          <p:nvPr/>
+        </p:nvSpPr>
+        <p:spPr>
+          <a:xfrm>
+            <a:off x="896112" y="2240280"/>
+            <a:ext cx="4791456" cy="3200400"/>
+          </a:xfrm>
+          <a:prstGeom prst="rect">
+            <a:avLst/>
+          </a:prstGeom>
+          <a:noFill/>
+        </p:spPr>
+        <p:txBody>
+          <a:bodyPr wrap="square">
+            <a:spAutoFit/>
+          </a:bodyPr>
+          <a:lstStyle/>
+          <a:p>
+            <a:pPr>
+              <a:spcAft>
+                <a:spcPts val="800"/>
+              </a:spcAft>
+            </a:pPr>
+            <a:r>
+              <a:rPr sz="1700">
+                <a:solidFill>
+                  <a:srgbClr val="212B36"/>
+                </a:solidFill>
+              </a:rPr>
+              <a:t>2 разряд - простые грузы до 5 т.</a:t>
+            </a:r>
+          </a:p>
+          <a:p>
+            <a:pPr>
+              <a:spcAft>
+                <a:spcPts val="800"/>
+              </a:spcAft>
+            </a:pPr>
+            <a:r>
+              <a:rPr sz="1700">
+                <a:solidFill>
+                  <a:srgbClr val="212B36"/>
+                </a:solidFill>
+              </a:rPr>
+              <a:t>3 разряд - простые грузы свыше 5 т до 25 т.</a:t>
+            </a:r>
+          </a:p>
+          <a:p>
+            <a:pPr>
+              <a:spcAft>
+                <a:spcPts val="800"/>
+              </a:spcAft>
+            </a:pPr>
+            <a:r>
+              <a:rPr sz="1700">
+                <a:solidFill>
+                  <a:srgbClr val="212B36"/>
+                </a:solidFill>
+              </a:rPr>
+              <a:t>4 разряд - сложные грузы до 5 т.</a:t>
+            </a:r>
+          </a:p>
+        </p:txBody>
+      </p:sp>
+      <p:sp>
+        <p:nvSpPr>
+          <p:cNvPr id="9" name="Rounded Rectangle 8"/>
+          <p:cNvSpPr/>
+          <p:nvPr/>
+        </p:nvSpPr>
+        <p:spPr>
+          <a:xfrm>
+            <a:off x="6309360" y="1325880"/>
+            <a:ext cx="5212080" cy="4297680"/>
+          </a:xfrm>
+          <a:prstGeom prst="roundRect">
+            <a:avLst/>
+          </a:prstGeom>
+          <a:solidFill>
+            <a:srgbClr val="FFFFFF"/>
+          </a:solidFill>
+          <a:ln w="19050">
+            <a:solidFill>
+              <a:srgbClr val="42855F"/>
+            </a:solidFill>
+          </a:ln>
+        </p:spPr>
+        <p:style>
+          <a:lnRef idx="1">
+            <a:schemeClr val="accent1"/>
+          </a:lnRef>
+          <a:fillRef idx="3">
+            <a:schemeClr val="accent1"/>
+          </a:fillRef>
+          <a:effectRef idx="2">
+            <a:schemeClr val="accent1"/>
+          </a:effectRef>
+          <a:fontRef idx="minor">
+            <a:schemeClr val="lt1"/>
+          </a:fontRef>
+        </p:style>
+        <p:txBody>
+          <a:bodyPr rtlCol="0" anchor="ctr"/>
+          <a:lstStyle/>
+          <a:p>
+            <a:pPr algn="ctr"/>
+            <a:endParaRPr/>
+          </a:p>
+        </p:txBody>
+      </p:sp>
+      <p:sp>
+        <p:nvSpPr>
+          <p:cNvPr id="10" name="Rounded Rectangle 9"/>
+          <p:cNvSpPr/>
+          <p:nvPr/>
+        </p:nvSpPr>
+        <p:spPr>
+          <a:xfrm>
+            <a:off x="6309360" y="1325880"/>
+            <a:ext cx="5212080" cy="658368"/>
+          </a:xfrm>
+          <a:prstGeom prst="roundRect">
+            <a:avLst/>
+          </a:prstGeom>
+          <a:solidFill>
+            <a:srgbClr val="42855F"/>
+          </a:solidFill>
+          <a:ln>
+            <a:solidFill>
+              <a:srgbClr val="42855F"/>
+            </a:solidFill>
+          </a:ln>
+        </p:spPr>
+        <p:style>
+          <a:lnRef idx="1">
+            <a:schemeClr val="accent1"/>
+          </a:lnRef>
+          <a:fillRef idx="3">
+            <a:schemeClr val="accent1"/>
+          </a:fillRef>
+          <a:effectRef idx="2">
+            <a:schemeClr val="accent1"/>
+          </a:effectRef>
+          <a:fontRef idx="minor">
+            <a:schemeClr val="lt1"/>
+          </a:fontRef>
+        </p:style>
+        <p:txBody>
+          <a:bodyPr rtlCol="0" anchor="ctr"/>
+          <a:lstStyle/>
+          <a:p>
+            <a:pPr algn="ctr"/>
+            <a:r>
+              <a:rPr sz="2200" b="1">
+                <a:solidFill>
+                  <a:srgbClr val="FFFFFF"/>
+                </a:solidFill>
+              </a:rPr>
+              <a:t>Как читать маршрут</a:t>
+            </a:r>
+          </a:p>
+        </p:txBody>
+      </p:sp>
+      <p:sp>
+        <p:nvSpPr>
+          <p:cNvPr id="11" name="TextBox 10"/>
+          <p:cNvSpPr txBox="1"/>
+          <p:nvPr/>
+        </p:nvSpPr>
+        <p:spPr>
+          <a:xfrm>
+            <a:off x="6565392" y="2240280"/>
+            <a:ext cx="4700016" cy="3200400"/>
+          </a:xfrm>
+          <a:prstGeom prst="rect">
+            <a:avLst/>
+          </a:prstGeom>
+          <a:noFill/>
+        </p:spPr>
+        <p:txBody>
+          <a:bodyPr wrap="square">
+            <a:spAutoFit/>
+          </a:bodyPr>
+          <a:lstStyle/>
+          <a:p>
+            <a:pPr>
+              <a:spcAft>
+                <a:spcPts val="800"/>
+              </a:spcAft>
+            </a:pPr>
+            <a:r>
+              <a:rPr sz="1700">
+                <a:solidFill>
+                  <a:srgbClr val="212B36"/>
+                </a:solidFill>
+              </a:rPr>
+              <a:t>Базовая часть курса закрывает 2-4 разряд.</a:t>
+            </a:r>
+          </a:p>
+          <a:p>
+            <a:pPr>
+              <a:spcAft>
+                <a:spcPts val="800"/>
+              </a:spcAft>
+            </a:pPr>
+            <a:r>
+              <a:rPr sz="1700">
+                <a:solidFill>
+                  <a:srgbClr val="212B36"/>
+                </a:solidFill>
+              </a:rPr>
+              <a:t>Для 5-6 разряда будут отдельные углубленные блоки.</a:t>
+            </a:r>
+          </a:p>
+          <a:p>
+            <a:pPr>
+              <a:spcAft>
+                <a:spcPts val="800"/>
+              </a:spcAft>
+            </a:pPr>
+            <a:r>
+              <a:rPr sz="1700">
+                <a:solidFill>
+                  <a:srgbClr val="212B36"/>
+                </a:solidFill>
+              </a:rPr>
+              <a:t>Дальше начинается практическая тема 2.</a:t>
+            </a:r>
+          </a:p>
+        </p:txBody>
+      </p:sp>
+      <p:sp>
+        <p:nvSpPr>
+          <p:cNvPr id="12" name="Rounded Rectangle 11">
+            <a:hlinkClick r:id="rId2" action="ppaction://hlinksldjump"/>
+          </p:cNvPr>
+          <p:cNvSpPr/>
+          <p:nvPr/>
+        </p:nvSpPr>
+        <p:spPr>
+          <a:xfrm>
+            <a:off x="640080" y="5989320"/>
+            <a:ext cx="2148840" cy="457200"/>
+          </a:xfrm>
+          <a:prstGeom prst="roundRect">
+            <a:avLst/>
+          </a:prstGeom>
+          <a:solidFill>
+            <a:srgbClr val="537795"/>
+          </a:solidFill>
+          <a:ln>
+            <a:solidFill>
+              <a:srgbClr val="537795"/>
+            </a:solidFill>
+          </a:ln>
+        </p:spPr>
+        <p:style>
+          <a:lnRef idx="1">
+            <a:schemeClr val="accent1"/>
+          </a:lnRef>
+          <a:fillRef idx="3">
+            <a:schemeClr val="accent1"/>
+          </a:fillRef>
+          <a:effectRef idx="2">
+            <a:schemeClr val="accent1"/>
+          </a:effectRef>
+          <a:fontRef idx="minor">
+            <a:schemeClr val="lt1"/>
+          </a:fontRef>
+        </p:style>
+        <p:txBody>
+          <a:bodyPr rtlCol="0" anchor="ctr"/>
+          <a:lstStyle/>
+          <a:p>
+            <a:pPr algn="ctr"/>
+            <a:r>
+              <a:rPr sz="1800" b="1">
+                <a:solidFill>
+                  <a:srgbClr val="FFFFFF"/>
+                </a:solidFill>
+              </a:rPr>
+              <a:t>НАЗАД</a:t>
+            </a:r>
+          </a:p>
+        </p:txBody>
+      </p:sp>
+      <p:sp>
+        <p:nvSpPr>
+          <p:cNvPr id="13" name="Rounded Rectangle 12">
+            <a:hlinkClick r:id="rId3" action="ppaction://hlinksldjump"/>
+          </p:cNvPr>
+          <p:cNvSpPr/>
+          <p:nvPr/>
+        </p:nvSpPr>
+        <p:spPr>
+          <a:xfrm>
+            <a:off x="9372600" y="5989320"/>
+            <a:ext cx="2148840" cy="457200"/>
+          </a:xfrm>
+          <a:prstGeom prst="roundRect">
+            <a:avLst/>
+          </a:prstGeom>
+          <a:solidFill>
+            <a:srgbClr val="DE7436"/>
+          </a:solidFill>
+          <a:ln>
+            <a:solidFill>
+              <a:srgbClr val="DE7436"/>
+            </a:solidFill>
+          </a:ln>
+        </p:spPr>
+        <p:style>
+          <a:lnRef idx="1">
+            <a:schemeClr val="accent1"/>
+          </a:lnRef>
+          <a:fillRef idx="3">
+            <a:schemeClr val="accent1"/>
+          </a:fillRef>
+          <a:effectRef idx="2">
+            <a:schemeClr val="accent1"/>
+          </a:effectRef>
+          <a:fontRef idx="minor">
+            <a:schemeClr val="lt1"/>
+          </a:fontRef>
+        </p:style>
+        <p:txBody>
+          <a:bodyPr rtlCol="0" anchor="ctr"/>
+          <a:lstStyle/>
+          <a:p>
+            <a:pPr algn="ctr"/>
+            <a:r>
+              <a:rPr sz="1800" b="1">
+                <a:solidFill>
+                  <a:srgbClr val="FFFFFF"/>
+                </a:solidFill>
+              </a:rPr>
+              <a:t>ДАЛЕЕ</a:t>
+            </a:r>
+          </a:p>
+        </p:txBody>
+      </p:sp>
+    </p:spTree>
+  </p:cSld>
+  <p:clrMapOvr>
+    <a:masterClrMapping/>
+  </p:clrMapOvr>
+</p:sld>
+</file>
+
+<file path=ppt/slides/slide9.xml><?xml version="1.0" encoding="utf-8"?>
+<p:sld xmlns:a="http://schemas.openxmlformats.org/drawingml/2006/main" xmlns:r="http://schemas.openxmlformats.org/officeDocument/2006/relationships" xmlns:p="http://schemas.openxmlformats.org/presentationml/2006/main">
+  <p:cSld>
+    <p:bg>
+      <p:bgPr>
+        <a:solidFill>
+          <a:srgbClr val="F0F4F7"/>
+        </a:solidFill>
+        <a:effectLst/>
+      </p:bgPr>
+    </p:bg>
+    <p:spTree>
+      <p:nvGrpSpPr>
+        <p:cNvPr id="1" name=""/>
+        <p:cNvGrpSpPr/>
+        <p:nvPr/>
+      </p:nvGrpSpPr>
+      <p:grpSpPr>
+        <a:xfrm>
+          <a:off x="0" y="0"/>
+          <a:ext cx="0" cy="0"/>
+          <a:chOff x="0" y="0"/>
+          <a:chExt cx="0" cy="0"/>
+        </a:xfrm>
+      </p:grpSpPr>
+      <p:sp>
+        <p:nvSpPr>
+          <p:cNvPr id="2" name="Rectangle 1"/>
+          <p:cNvSpPr/>
+          <p:nvPr/>
+        </p:nvSpPr>
+        <p:spPr>
+          <a:xfrm>
+            <a:off x="0" y="0"/>
+            <a:ext cx="12191695" cy="658368"/>
+          </a:xfrm>
+          <a:prstGeom prst="rect">
+            <a:avLst/>
+          </a:prstGeom>
+          <a:solidFill>
+            <a:srgbClr val="122B42"/>
+          </a:solidFill>
+          <a:ln>
+            <a:noFill/>
+          </a:ln>
+        </p:spPr>
+        <p:style>
+          <a:lnRef idx="1">
+            <a:schemeClr val="accent1"/>
+          </a:lnRef>
+          <a:fillRef idx="3">
+            <a:schemeClr val="accent1"/>
+          </a:fillRef>
+          <a:effectRef idx="2">
+            <a:schemeClr val="accent1"/>
+          </a:effectRef>
+          <a:fontRef idx="minor">
+            <a:schemeClr val="lt1"/>
+          </a:fontRef>
+        </p:style>
+        <p:txBody>
+          <a:bodyPr rtlCol="0" anchor="ctr"/>
+          <a:lstStyle/>
+          <a:p>
+            <a:pPr algn="ctr"/>
+            <a:endParaRPr/>
+          </a:p>
+        </p:txBody>
+      </p:sp>
+      <p:sp>
+        <p:nvSpPr>
+          <p:cNvPr id="3" name="TextBox 2"/>
+          <p:cNvSpPr txBox="1"/>
+          <p:nvPr/>
+        </p:nvSpPr>
+        <p:spPr>
+          <a:xfrm>
+            <a:off x="411480" y="128016"/>
+            <a:ext cx="7863840" cy="274320"/>
+          </a:xfrm>
+          <a:prstGeom prst="rect">
+            <a:avLst/>
+          </a:prstGeom>
+          <a:noFill/>
+        </p:spPr>
+        <p:txBody>
+          <a:bodyPr wrap="square">
+            <a:spAutoFit/>
+          </a:bodyPr>
+          <a:lstStyle/>
+          <a:p>
+            <a:pPr algn="l"/>
+            <a:r>
+              <a:rPr sz="2400" b="1">
+                <a:solidFill>
+                  <a:srgbClr val="FFFFFF"/>
+                </a:solidFill>
+              </a:rPr>
+              <a:t>Тема 2. Стропальные работы</a:t>
+            </a:r>
+          </a:p>
+        </p:txBody>
+      </p:sp>
+      <p:sp>
+        <p:nvSpPr>
+          <p:cNvPr id="4" name="Rounded Rectangle 3"/>
+          <p:cNvSpPr/>
+          <p:nvPr/>
+        </p:nvSpPr>
+        <p:spPr>
+          <a:xfrm>
+            <a:off x="10469880" y="128016"/>
+            <a:ext cx="1234440" cy="320040"/>
+          </a:xfrm>
+          <a:prstGeom prst="roundRect">
+            <a:avLst/>
+          </a:prstGeom>
+          <a:solidFill>
+            <a:srgbClr val="DE7436"/>
+          </a:solidFill>
+          <a:ln>
+            <a:noFill/>
+          </a:ln>
+        </p:spPr>
+        <p:style>
+          <a:lnRef idx="1">
+            <a:schemeClr val="accent1"/>
+          </a:lnRef>
+          <a:fillRef idx="3">
+            <a:schemeClr val="accent1"/>
+          </a:fillRef>
+          <a:effectRef idx="2">
+            <a:schemeClr val="accent1"/>
+          </a:effectRef>
+          <a:fontRef idx="minor">
+            <a:schemeClr val="lt1"/>
+          </a:fontRef>
+        </p:style>
+        <p:txBody>
+          <a:bodyPr rtlCol="0" anchor="ctr"/>
+          <a:lstStyle/>
+          <a:p>
+            <a:pPr algn="ctr"/>
+            <a:r>
+              <a:rPr sz="1600" b="1">
+                <a:solidFill>
+                  <a:srgbClr val="FFFFFF"/>
+                </a:solidFill>
+              </a:rPr>
+              <a:t>S007</a:t>
+            </a:r>
+          </a:p>
+        </p:txBody>
+      </p:sp>
+      <p:sp>
+        <p:nvSpPr>
+          <p:cNvPr id="5" name="TextBox 4"/>
+          <p:cNvSpPr txBox="1"/>
+          <p:nvPr/>
+        </p:nvSpPr>
+        <p:spPr>
+          <a:xfrm>
+            <a:off x="457200" y="749808"/>
+            <a:ext cx="5943600" cy="228600"/>
+          </a:xfrm>
+          <a:prstGeom prst="rect">
+            <a:avLst/>
+          </a:prstGeom>
+          <a:noFill/>
+        </p:spPr>
+        <p:txBody>
+          <a:bodyPr wrap="square">
+            <a:spAutoFit/>
+          </a:bodyPr>
+          <a:lstStyle/>
+          <a:p>
+            <a:pPr algn="l"/>
+            <a:r>
+              <a:rPr sz="1100" b="0">
+                <a:solidFill>
+                  <a:srgbClr val="6E7A86"/>
+                </a:solidFill>
+              </a:rPr>
+              <a:t>Переход к основному практическому блоку</a:t>
+            </a:r>
+          </a:p>
+        </p:txBody>
+      </p:sp>
+      <p:sp>
+        <p:nvSpPr>
+          <p:cNvPr id="6" name="Rounded Rectangle 5"/>
+          <p:cNvSpPr/>
+          <p:nvPr/>
+        </p:nvSpPr>
+        <p:spPr>
+          <a:xfrm>
+            <a:off x="822960" y="1463040"/>
+            <a:ext cx="5074920" cy="4069080"/>
+          </a:xfrm>
+          <a:prstGeom prst="roundRect">
+            <a:avLst/>
+          </a:prstGeom>
+          <a:solidFill>
+            <a:srgbClr val="FFFFFF"/>
+          </a:solidFill>
+          <a:ln w="19050">
+            <a:solidFill>
+              <a:srgbClr val="265A89"/>
+            </a:solidFill>
+          </a:ln>
+        </p:spPr>
+        <p:style>
+          <a:lnRef idx="1">
+            <a:schemeClr val="accent1"/>
+          </a:lnRef>
+          <a:fillRef idx="3">
+            <a:schemeClr val="accent1"/>
+          </a:fillRef>
+          <a:effectRef idx="2">
+            <a:schemeClr val="accent1"/>
+          </a:effectRef>
+          <a:fontRef idx="minor">
+            <a:schemeClr val="lt1"/>
+          </a:fontRef>
+        </p:style>
+        <p:txBody>
+          <a:bodyPr rtlCol="0" anchor="ctr"/>
+          <a:lstStyle/>
+          <a:p>
+            <a:pPr algn="ctr"/>
+            <a:endParaRPr/>
+          </a:p>
+        </p:txBody>
+      </p:sp>
+      <p:sp>
+        <p:nvSpPr>
+          <p:cNvPr id="7" name="Rounded Rectangle 6"/>
+          <p:cNvSpPr/>
+          <p:nvPr/>
+        </p:nvSpPr>
+        <p:spPr>
+          <a:xfrm>
+            <a:off x="822960" y="1463040"/>
+            <a:ext cx="5074920" cy="658368"/>
+          </a:xfrm>
+          <a:prstGeom prst="roundRect">
+            <a:avLst/>
+          </a:prstGeom>
+          <a:solidFill>
+            <a:srgbClr val="265A89"/>
+          </a:solidFill>
+          <a:ln>
+            <a:solidFill>
+              <a:srgbClr val="265A89"/>
+            </a:solidFill>
+          </a:ln>
+        </p:spPr>
+        <p:style>
+          <a:lnRef idx="1">
+            <a:schemeClr val="accent1"/>
+          </a:lnRef>
+          <a:fillRef idx="3">
+            <a:schemeClr val="accent1"/>
+          </a:fillRef>
+          <a:effectRef idx="2">
+            <a:schemeClr val="accent1"/>
+          </a:effectRef>
+          <a:fontRef idx="minor">
+            <a:schemeClr val="lt1"/>
+          </a:fontRef>
+        </p:style>
+        <p:txBody>
+          <a:bodyPr rtlCol="0" anchor="ctr"/>
+          <a:lstStyle/>
+          <a:p>
+            <a:pPr algn="ctr"/>
+            <a:r>
+              <a:rPr sz="2200" b="1">
+                <a:solidFill>
+                  <a:srgbClr val="FFFFFF"/>
+                </a:solidFill>
+              </a:rPr>
+              <a:t>Что дальше</a:t>
+            </a:r>
+          </a:p>
+        </p:txBody>
+      </p:sp>
+      <p:sp>
+        <p:nvSpPr>
+          <p:cNvPr id="8" name="TextBox 7"/>
+          <p:cNvSpPr txBox="1"/>
+          <p:nvPr/>
+        </p:nvSpPr>
+        <p:spPr>
+          <a:xfrm>
+            <a:off x="1078992" y="2377440"/>
+            <a:ext cx="4562856" cy="2971800"/>
+          </a:xfrm>
+          <a:prstGeom prst="rect">
+            <a:avLst/>
+          </a:prstGeom>
+          <a:noFill/>
+        </p:spPr>
+        <p:txBody>
+          <a:bodyPr wrap="square">
+            <a:spAutoFit/>
+          </a:bodyPr>
+          <a:lstStyle/>
+          <a:p>
+            <a:pPr>
+              <a:spcAft>
+                <a:spcPts val="800"/>
+              </a:spcAft>
+            </a:pPr>
+            <a:r>
+              <a:rPr sz="1700">
+                <a:solidFill>
+                  <a:srgbClr val="212B36"/>
+                </a:solidFill>
+              </a:rPr>
+              <a:t>В Теме 2 начинается прикладная часть курса.</a:t>
+            </a:r>
+          </a:p>
+          <a:p>
+            <a:pPr>
+              <a:spcAft>
+                <a:spcPts val="800"/>
+              </a:spcAft>
+            </a:pPr>
+            <a:r>
+              <a:rPr sz="1700">
+                <a:solidFill>
+                  <a:srgbClr val="212B36"/>
+                </a:solidFill>
+              </a:rPr>
+              <a:t>Здесь будут грузы, схемы строповки, сигналы и опасные зоны.</a:t>
+            </a:r>
+          </a:p>
+          <a:p>
+            <a:pPr>
+              <a:spcAft>
+                <a:spcPts val="800"/>
+              </a:spcAft>
+            </a:pPr>
+            <a:r>
+              <a:rPr sz="1700">
+                <a:solidFill>
+                  <a:srgbClr val="212B36"/>
+                </a:solidFill>
+              </a:rPr>
+              <a:t>Это точка перехода из вводной части в основную работу.</a:t>
+            </a:r>
+          </a:p>
+        </p:txBody>
+      </p:sp>
+      <p:sp>
+        <p:nvSpPr>
+          <p:cNvPr id="9" name="Rounded Rectangle 8"/>
+          <p:cNvSpPr/>
+          <p:nvPr/>
+        </p:nvSpPr>
+        <p:spPr>
+          <a:xfrm>
+            <a:off x="6217920" y="1645920"/>
+            <a:ext cx="4572000" cy="2560320"/>
+          </a:xfrm>
+          <a:prstGeom prst="roundRect">
+            <a:avLst/>
+          </a:prstGeom>
+          <a:solidFill>
+            <a:srgbClr val="FFFFFF"/>
+          </a:solidFill>
+          <a:ln>
+            <a:solidFill>
+              <a:srgbClr val="42855F"/>
+            </a:solidFill>
+          </a:ln>
+        </p:spPr>
+        <p:style>
+          <a:lnRef idx="1">
+            <a:schemeClr val="accent1"/>
+          </a:lnRef>
+          <a:fillRef idx="3">
+            <a:schemeClr val="accent1"/>
+          </a:fillRef>
+          <a:effectRef idx="2">
+            <a:schemeClr val="accent1"/>
+          </a:effectRef>
+          <a:fontRef idx="minor">
+            <a:schemeClr val="lt1"/>
+          </a:fontRef>
+        </p:style>
+        <p:txBody>
+          <a:bodyPr rtlCol="0" anchor="ctr"/>
+          <a:lstStyle/>
+          <a:p>
+            <a:pPr algn="ctr"/>
+            <a:endParaRPr/>
+          </a:p>
+        </p:txBody>
+      </p:sp>
+      <p:sp>
+        <p:nvSpPr>
+          <p:cNvPr id="10" name="TextBox 9"/>
+          <p:cNvSpPr txBox="1"/>
+          <p:nvPr/>
+        </p:nvSpPr>
+        <p:spPr>
+          <a:xfrm>
+            <a:off x="6583680" y="1965960"/>
+            <a:ext cx="3840480" cy="1417320"/>
+          </a:xfrm>
+          <a:prstGeom prst="rect">
+            <a:avLst/>
+          </a:prstGeom>
+          <a:noFill/>
+        </p:spPr>
+        <p:txBody>
+          <a:bodyPr wrap="square">
+            <a:spAutoFit/>
+          </a:bodyPr>
+          <a:lstStyle/>
+          <a:p>
+            <a:pPr algn="ctr"/>
+            <a:r>
+              <a:rPr sz="1900" b="1">
+                <a:solidFill>
+                  <a:srgbClr val="212B36"/>
+                </a:solidFill>
+              </a:rPr>
+              <a:t>Тема 2.1 Грузы
+→ Тема 2.2 Технология
+→ Тема 2.3 Производство работ</a:t>
+            </a:r>
+          </a:p>
+        </p:txBody>
+      </p:sp>
+      <p:sp>
+        <p:nvSpPr>
+          <p:cNvPr id="11" name="Rounded Rectangle 10">
+            <a:hlinkClick r:id="rId2" action="ppaction://hlinksldjump"/>
+          </p:cNvPr>
+          <p:cNvSpPr/>
+          <p:nvPr/>
+        </p:nvSpPr>
+        <p:spPr>
+          <a:xfrm>
+            <a:off x="640080" y="5989320"/>
+            <a:ext cx="2148840" cy="457200"/>
+          </a:xfrm>
+          <a:prstGeom prst="roundRect">
+            <a:avLst/>
+          </a:prstGeom>
+          <a:solidFill>
+            <a:srgbClr val="537795"/>
+          </a:solidFill>
+          <a:ln>
+            <a:solidFill>
+              <a:srgbClr val="537795"/>
+            </a:solidFill>
+          </a:ln>
+        </p:spPr>
+        <p:style>
+          <a:lnRef idx="1">
+            <a:schemeClr val="accent1"/>
+          </a:lnRef>
+          <a:fillRef idx="3">
+            <a:schemeClr val="accent1"/>
+          </a:fillRef>
+          <a:effectRef idx="2">
+            <a:schemeClr val="accent1"/>
+          </a:effectRef>
+          <a:fontRef idx="minor">
+            <a:schemeClr val="lt1"/>
+          </a:fontRef>
+        </p:style>
+        <p:txBody>
+          <a:bodyPr rtlCol="0" anchor="ctr"/>
+          <a:lstStyle/>
+          <a:p>
+            <a:pPr algn="ctr"/>
+            <a:r>
+              <a:rPr sz="1800" b="1">
+                <a:solidFill>
+                  <a:srgbClr val="FFFFFF"/>
+                </a:solidFill>
+              </a:rPr>
+              <a:t>НАЗАД</a:t>
             </a:r>
           </a:p>
         </p:txBody>
